--- a/Especializacion/Proyecto I/Clases/Sesion 06 - Marco conceptual y marco contextual/Presentacion.pptx
+++ b/Especializacion/Proyecto I/Clases/Sesion 06 - Marco conceptual y marco contextual/Presentacion.pptx
@@ -3365,41 +3365,6 @@
           </a:p>
         </p:txBody>
       </p:sp>
-      <p:sp>
-        <p:nvSpPr>
-          <p:cNvPr id="7" name="TextBox 6"/>
-          <p:cNvSpPr txBox="1"/>
-          <p:nvPr/>
-        </p:nvSpPr>
-        <p:spPr>
-          <a:xfrm>
-            <a:off x="2194560" y="6446520"/>
-            <a:ext cx="5943600" cy="274320"/>
-          </a:xfrm>
-          <a:prstGeom prst="rect">
-            <a:avLst/>
-          </a:prstGeom>
-          <a:noFill/>
-        </p:spPr>
-        <p:txBody>
-          <a:bodyPr wrap="square" anchor="t" lIns="0" rIns="0" tIns="0" bIns="0">
-            <a:spAutoFit/>
-          </a:bodyPr>
-          <a:lstStyle/>
-          <a:p>
-            <a:pPr algn="l"/>
-            <a:r>
-              <a:rPr sz="1000" b="1" i="0">
-                <a:solidFill>
-                  <a:srgbClr val="8F989D"/>
-                </a:solidFill>
-                <a:latin typeface="Calibri"/>
-              </a:rPr>
-              <a:t>Inicio 8:10 pm</a:t>
-            </a:r>
-          </a:p>
-        </p:txBody>
-      </p:sp>
     </p:spTree>
   </p:cSld>
   <p:clrMapOvr>
@@ -3826,41 +3791,6 @@
         </p:nvSpPr>
         <p:spPr>
           <a:xfrm>
-            <a:off x="2194560" y="6446520"/>
-            <a:ext cx="5943600" cy="274320"/>
-          </a:xfrm>
-          <a:prstGeom prst="rect">
-            <a:avLst/>
-          </a:prstGeom>
-          <a:noFill/>
-        </p:spPr>
-        <p:txBody>
-          <a:bodyPr wrap="square" anchor="t" lIns="0" rIns="0" tIns="0" bIns="0">
-            <a:spAutoFit/>
-          </a:bodyPr>
-          <a:lstStyle/>
-          <a:p>
-            <a:pPr algn="l"/>
-            <a:r>
-              <a:rPr sz="1000" b="1" i="0">
-                <a:solidFill>
-                  <a:srgbClr val="8F989D"/>
-                </a:solidFill>
-                <a:latin typeface="Calibri"/>
-              </a:rPr>
-              <a:t>Inicio 8:10 pm</a:t>
-            </a:r>
-          </a:p>
-        </p:txBody>
-      </p:sp>
-      <p:sp>
-        <p:nvSpPr>
-          <p:cNvPr id="6" name="TextBox 5"/>
-          <p:cNvSpPr txBox="1"/>
-          <p:nvPr/>
-        </p:nvSpPr>
-        <p:spPr>
-          <a:xfrm>
             <a:off x="11094415" y="6446520"/>
             <a:ext cx="548640" cy="274320"/>
           </a:xfrm>
@@ -3890,7 +3820,7 @@
       </p:sp>
       <p:sp>
         <p:nvSpPr>
-          <p:cNvPr id="7" name="TextBox 6"/>
+          <p:cNvPr id="6" name="TextBox 5"/>
           <p:cNvSpPr txBox="1"/>
           <p:nvPr/>
         </p:nvSpPr>
@@ -4188,41 +4118,6 @@
         </p:nvSpPr>
         <p:spPr>
           <a:xfrm>
-            <a:off x="2194560" y="6446520"/>
-            <a:ext cx="5943600" cy="274320"/>
-          </a:xfrm>
-          <a:prstGeom prst="rect">
-            <a:avLst/>
-          </a:prstGeom>
-          <a:noFill/>
-        </p:spPr>
-        <p:txBody>
-          <a:bodyPr wrap="square" anchor="t" lIns="0" rIns="0" tIns="0" bIns="0">
-            <a:spAutoFit/>
-          </a:bodyPr>
-          <a:lstStyle/>
-          <a:p>
-            <a:pPr algn="l"/>
-            <a:r>
-              <a:rPr sz="1000" b="1" i="0">
-                <a:solidFill>
-                  <a:srgbClr val="8F989D"/>
-                </a:solidFill>
-                <a:latin typeface="Calibri"/>
-              </a:rPr>
-              <a:t>Inicio 8:10 pm</a:t>
-            </a:r>
-          </a:p>
-        </p:txBody>
-      </p:sp>
-      <p:sp>
-        <p:nvSpPr>
-          <p:cNvPr id="6" name="TextBox 5"/>
-          <p:cNvSpPr txBox="1"/>
-          <p:nvPr/>
-        </p:nvSpPr>
-        <p:spPr>
-          <a:xfrm>
             <a:off x="11094415" y="6446520"/>
             <a:ext cx="548640" cy="274320"/>
           </a:xfrm>
@@ -4252,7 +4147,7 @@
       </p:sp>
       <p:sp>
         <p:nvSpPr>
-          <p:cNvPr id="7" name="TextBox 6"/>
+          <p:cNvPr id="6" name="TextBox 5"/>
           <p:cNvSpPr txBox="1"/>
           <p:nvPr/>
         </p:nvSpPr>
@@ -4742,41 +4637,6 @@
         </p:nvSpPr>
         <p:spPr>
           <a:xfrm>
-            <a:off x="2194560" y="6446520"/>
-            <a:ext cx="5943600" cy="274320"/>
-          </a:xfrm>
-          <a:prstGeom prst="rect">
-            <a:avLst/>
-          </a:prstGeom>
-          <a:noFill/>
-        </p:spPr>
-        <p:txBody>
-          <a:bodyPr wrap="square" anchor="t" lIns="0" rIns="0" tIns="0" bIns="0">
-            <a:spAutoFit/>
-          </a:bodyPr>
-          <a:lstStyle/>
-          <a:p>
-            <a:pPr algn="l"/>
-            <a:r>
-              <a:rPr sz="1000" b="1" i="0">
-                <a:solidFill>
-                  <a:srgbClr val="8F989D"/>
-                </a:solidFill>
-                <a:latin typeface="Calibri"/>
-              </a:rPr>
-              <a:t>Inicio 8:10 pm</a:t>
-            </a:r>
-          </a:p>
-        </p:txBody>
-      </p:sp>
-      <p:sp>
-        <p:nvSpPr>
-          <p:cNvPr id="11" name="TextBox 10"/>
-          <p:cNvSpPr txBox="1"/>
-          <p:nvPr/>
-        </p:nvSpPr>
-        <p:spPr>
-          <a:xfrm>
             <a:off x="11094415" y="6446520"/>
             <a:ext cx="548640" cy="274320"/>
           </a:xfrm>
@@ -5020,41 +4880,6 @@
         </p:nvSpPr>
         <p:spPr>
           <a:xfrm>
-            <a:off x="2194560" y="6446520"/>
-            <a:ext cx="5943600" cy="274320"/>
-          </a:xfrm>
-          <a:prstGeom prst="rect">
-            <a:avLst/>
-          </a:prstGeom>
-          <a:noFill/>
-        </p:spPr>
-        <p:txBody>
-          <a:bodyPr wrap="square" anchor="t" lIns="0" rIns="0" tIns="0" bIns="0">
-            <a:spAutoFit/>
-          </a:bodyPr>
-          <a:lstStyle/>
-          <a:p>
-            <a:pPr algn="l"/>
-            <a:r>
-              <a:rPr sz="1000" b="1" i="0">
-                <a:solidFill>
-                  <a:srgbClr val="8F989D"/>
-                </a:solidFill>
-                <a:latin typeface="Calibri"/>
-              </a:rPr>
-              <a:t>Inicio 8:10 pm</a:t>
-            </a:r>
-          </a:p>
-        </p:txBody>
-      </p:sp>
-      <p:sp>
-        <p:nvSpPr>
-          <p:cNvPr id="7" name="TextBox 6"/>
-          <p:cNvSpPr txBox="1"/>
-          <p:nvPr/>
-        </p:nvSpPr>
-        <p:spPr>
-          <a:xfrm>
             <a:off x="11094415" y="6446520"/>
             <a:ext cx="548640" cy="274320"/>
           </a:xfrm>
@@ -5544,41 +5369,6 @@
         </p:nvSpPr>
         <p:spPr>
           <a:xfrm>
-            <a:off x="2194560" y="6446520"/>
-            <a:ext cx="5943600" cy="274320"/>
-          </a:xfrm>
-          <a:prstGeom prst="rect">
-            <a:avLst/>
-          </a:prstGeom>
-          <a:noFill/>
-        </p:spPr>
-        <p:txBody>
-          <a:bodyPr wrap="square" anchor="t" lIns="0" rIns="0" tIns="0" bIns="0">
-            <a:spAutoFit/>
-          </a:bodyPr>
-          <a:lstStyle/>
-          <a:p>
-            <a:pPr algn="l"/>
-            <a:r>
-              <a:rPr sz="1000" b="1" i="0">
-                <a:solidFill>
-                  <a:srgbClr val="8F989D"/>
-                </a:solidFill>
-                <a:latin typeface="Calibri"/>
-              </a:rPr>
-              <a:t>Inicio 8:10 pm</a:t>
-            </a:r>
-          </a:p>
-        </p:txBody>
-      </p:sp>
-      <p:sp>
-        <p:nvSpPr>
-          <p:cNvPr id="6" name="TextBox 5"/>
-          <p:cNvSpPr txBox="1"/>
-          <p:nvPr/>
-        </p:nvSpPr>
-        <p:spPr>
-          <a:xfrm>
             <a:off x="11094415" y="6446520"/>
             <a:ext cx="548640" cy="274320"/>
           </a:xfrm>
@@ -5608,7 +5398,7 @@
       </p:sp>
       <p:sp>
         <p:nvSpPr>
-          <p:cNvPr id="7" name="TextBox 6"/>
+          <p:cNvPr id="6" name="TextBox 5"/>
           <p:cNvSpPr txBox="1"/>
           <p:nvPr/>
         </p:nvSpPr>
@@ -6030,41 +5820,6 @@
         </p:nvSpPr>
         <p:spPr>
           <a:xfrm>
-            <a:off x="2194560" y="6446520"/>
-            <a:ext cx="5943600" cy="274320"/>
-          </a:xfrm>
-          <a:prstGeom prst="rect">
-            <a:avLst/>
-          </a:prstGeom>
-          <a:noFill/>
-        </p:spPr>
-        <p:txBody>
-          <a:bodyPr wrap="square" anchor="t" lIns="0" rIns="0" tIns="0" bIns="0">
-            <a:spAutoFit/>
-          </a:bodyPr>
-          <a:lstStyle/>
-          <a:p>
-            <a:pPr algn="l"/>
-            <a:r>
-              <a:rPr sz="1000" b="1" i="0">
-                <a:solidFill>
-                  <a:srgbClr val="8F989D"/>
-                </a:solidFill>
-                <a:latin typeface="Calibri"/>
-              </a:rPr>
-              <a:t>Inicio 8:10 pm</a:t>
-            </a:r>
-          </a:p>
-        </p:txBody>
-      </p:sp>
-      <p:sp>
-        <p:nvSpPr>
-          <p:cNvPr id="6" name="TextBox 5"/>
-          <p:cNvSpPr txBox="1"/>
-          <p:nvPr/>
-        </p:nvSpPr>
-        <p:spPr>
-          <a:xfrm>
             <a:off x="11094415" y="6446520"/>
             <a:ext cx="548640" cy="274320"/>
           </a:xfrm>
@@ -6094,7 +5849,7 @@
       </p:sp>
       <p:sp>
         <p:nvSpPr>
-          <p:cNvPr id="7" name="TextBox 6"/>
+          <p:cNvPr id="6" name="TextBox 5"/>
           <p:cNvSpPr txBox="1"/>
           <p:nvPr/>
         </p:nvSpPr>
@@ -6939,41 +6694,6 @@
         </p:nvSpPr>
         <p:spPr>
           <a:xfrm>
-            <a:off x="2194560" y="6446520"/>
-            <a:ext cx="5943600" cy="274320"/>
-          </a:xfrm>
-          <a:prstGeom prst="rect">
-            <a:avLst/>
-          </a:prstGeom>
-          <a:noFill/>
-        </p:spPr>
-        <p:txBody>
-          <a:bodyPr wrap="square" anchor="t" lIns="0" rIns="0" tIns="0" bIns="0">
-            <a:spAutoFit/>
-          </a:bodyPr>
-          <a:lstStyle/>
-          <a:p>
-            <a:pPr algn="l"/>
-            <a:r>
-              <a:rPr sz="1000" b="1" i="0">
-                <a:solidFill>
-                  <a:srgbClr val="8F989D"/>
-                </a:solidFill>
-                <a:latin typeface="Calibri"/>
-              </a:rPr>
-              <a:t>Inicio 8:10 pm</a:t>
-            </a:r>
-          </a:p>
-        </p:txBody>
-      </p:sp>
-      <p:sp>
-        <p:nvSpPr>
-          <p:cNvPr id="7" name="TextBox 6"/>
-          <p:cNvSpPr txBox="1"/>
-          <p:nvPr/>
-        </p:nvSpPr>
-        <p:spPr>
-          <a:xfrm>
             <a:off x="11094415" y="6446520"/>
             <a:ext cx="548640" cy="274320"/>
           </a:xfrm>
@@ -7409,41 +7129,6 @@
         </p:nvSpPr>
         <p:spPr>
           <a:xfrm>
-            <a:off x="2194560" y="6446520"/>
-            <a:ext cx="5943600" cy="274320"/>
-          </a:xfrm>
-          <a:prstGeom prst="rect">
-            <a:avLst/>
-          </a:prstGeom>
-          <a:noFill/>
-        </p:spPr>
-        <p:txBody>
-          <a:bodyPr wrap="square" anchor="t" lIns="0" rIns="0" tIns="0" bIns="0">
-            <a:spAutoFit/>
-          </a:bodyPr>
-          <a:lstStyle/>
-          <a:p>
-            <a:pPr algn="l"/>
-            <a:r>
-              <a:rPr sz="1000" b="1" i="0">
-                <a:solidFill>
-                  <a:srgbClr val="8F989D"/>
-                </a:solidFill>
-                <a:latin typeface="Calibri"/>
-              </a:rPr>
-              <a:t>Inicio 8:10 pm</a:t>
-            </a:r>
-          </a:p>
-        </p:txBody>
-      </p:sp>
-      <p:sp>
-        <p:nvSpPr>
-          <p:cNvPr id="6" name="TextBox 5"/>
-          <p:cNvSpPr txBox="1"/>
-          <p:nvPr/>
-        </p:nvSpPr>
-        <p:spPr>
-          <a:xfrm>
             <a:off x="11094415" y="6446520"/>
             <a:ext cx="548640" cy="274320"/>
           </a:xfrm>
@@ -7473,7 +7158,7 @@
       </p:sp>
       <p:sp>
         <p:nvSpPr>
-          <p:cNvPr id="7" name="TextBox 6"/>
+          <p:cNvPr id="6" name="TextBox 5"/>
           <p:cNvSpPr txBox="1"/>
           <p:nvPr/>
         </p:nvSpPr>
@@ -7724,41 +7409,6 @@
           </a:p>
         </p:txBody>
       </p:sp>
-      <p:sp>
-        <p:nvSpPr>
-          <p:cNvPr id="7" name="TextBox 6"/>
-          <p:cNvSpPr txBox="1"/>
-          <p:nvPr/>
-        </p:nvSpPr>
-        <p:spPr>
-          <a:xfrm>
-            <a:off x="2194560" y="6446520"/>
-            <a:ext cx="5943600" cy="274320"/>
-          </a:xfrm>
-          <a:prstGeom prst="rect">
-            <a:avLst/>
-          </a:prstGeom>
-          <a:noFill/>
-        </p:spPr>
-        <p:txBody>
-          <a:bodyPr wrap="square" anchor="t" lIns="0" rIns="0" tIns="0" bIns="0">
-            <a:spAutoFit/>
-          </a:bodyPr>
-          <a:lstStyle/>
-          <a:p>
-            <a:pPr algn="l"/>
-            <a:r>
-              <a:rPr sz="1000" b="1" i="0">
-                <a:solidFill>
-                  <a:srgbClr val="8F989D"/>
-                </a:solidFill>
-                <a:latin typeface="Calibri"/>
-              </a:rPr>
-              <a:t>Inicio 8:10 pm</a:t>
-            </a:r>
-          </a:p>
-        </p:txBody>
-      </p:sp>
     </p:spTree>
   </p:cSld>
   <p:clrMapOvr>
@@ -8043,41 +7693,6 @@
         </p:nvSpPr>
         <p:spPr>
           <a:xfrm>
-            <a:off x="2194560" y="6446520"/>
-            <a:ext cx="5943600" cy="274320"/>
-          </a:xfrm>
-          <a:prstGeom prst="rect">
-            <a:avLst/>
-          </a:prstGeom>
-          <a:noFill/>
-        </p:spPr>
-        <p:txBody>
-          <a:bodyPr wrap="square" anchor="t" lIns="0" rIns="0" tIns="0" bIns="0">
-            <a:spAutoFit/>
-          </a:bodyPr>
-          <a:lstStyle/>
-          <a:p>
-            <a:pPr algn="l"/>
-            <a:r>
-              <a:rPr sz="1000" b="1" i="0">
-                <a:solidFill>
-                  <a:srgbClr val="8F989D"/>
-                </a:solidFill>
-                <a:latin typeface="Calibri"/>
-              </a:rPr>
-              <a:t>Inicio 8:10 pm</a:t>
-            </a:r>
-          </a:p>
-        </p:txBody>
-      </p:sp>
-      <p:sp>
-        <p:nvSpPr>
-          <p:cNvPr id="6" name="TextBox 5"/>
-          <p:cNvSpPr txBox="1"/>
-          <p:nvPr/>
-        </p:nvSpPr>
-        <p:spPr>
-          <a:xfrm>
             <a:off x="11094415" y="6446520"/>
             <a:ext cx="548640" cy="274320"/>
           </a:xfrm>
@@ -8107,7 +7722,7 @@
       </p:sp>
       <p:sp>
         <p:nvSpPr>
-          <p:cNvPr id="7" name="TextBox 6"/>
+          <p:cNvPr id="6" name="TextBox 5"/>
           <p:cNvSpPr txBox="1"/>
           <p:nvPr/>
         </p:nvSpPr>
@@ -8457,41 +8072,6 @@
         </p:nvSpPr>
         <p:spPr>
           <a:xfrm>
-            <a:off x="2194560" y="6446520"/>
-            <a:ext cx="5943600" cy="274320"/>
-          </a:xfrm>
-          <a:prstGeom prst="rect">
-            <a:avLst/>
-          </a:prstGeom>
-          <a:noFill/>
-        </p:spPr>
-        <p:txBody>
-          <a:bodyPr wrap="square" anchor="t" lIns="0" rIns="0" tIns="0" bIns="0">
-            <a:spAutoFit/>
-          </a:bodyPr>
-          <a:lstStyle/>
-          <a:p>
-            <a:pPr algn="l"/>
-            <a:r>
-              <a:rPr sz="1000" b="1" i="0">
-                <a:solidFill>
-                  <a:srgbClr val="8F989D"/>
-                </a:solidFill>
-                <a:latin typeface="Calibri"/>
-              </a:rPr>
-              <a:t>Inicio 8:10 pm</a:t>
-            </a:r>
-          </a:p>
-        </p:txBody>
-      </p:sp>
-      <p:sp>
-        <p:nvSpPr>
-          <p:cNvPr id="6" name="TextBox 5"/>
-          <p:cNvSpPr txBox="1"/>
-          <p:nvPr/>
-        </p:nvSpPr>
-        <p:spPr>
-          <a:xfrm>
             <a:off x="11094415" y="6446520"/>
             <a:ext cx="548640" cy="274320"/>
           </a:xfrm>
@@ -8521,7 +8101,7 @@
       </p:sp>
       <p:sp>
         <p:nvSpPr>
-          <p:cNvPr id="7" name="TextBox 6"/>
+          <p:cNvPr id="6" name="TextBox 5"/>
           <p:cNvSpPr txBox="1"/>
           <p:nvPr/>
         </p:nvSpPr>
@@ -9233,41 +8813,6 @@
         </p:nvSpPr>
         <p:spPr>
           <a:xfrm>
-            <a:off x="2194560" y="6446520"/>
-            <a:ext cx="5943600" cy="274320"/>
-          </a:xfrm>
-          <a:prstGeom prst="rect">
-            <a:avLst/>
-          </a:prstGeom>
-          <a:noFill/>
-        </p:spPr>
-        <p:txBody>
-          <a:bodyPr wrap="square" anchor="t" lIns="0" rIns="0" tIns="0" bIns="0">
-            <a:spAutoFit/>
-          </a:bodyPr>
-          <a:lstStyle/>
-          <a:p>
-            <a:pPr algn="l"/>
-            <a:r>
-              <a:rPr sz="1000" b="1" i="0">
-                <a:solidFill>
-                  <a:srgbClr val="8F989D"/>
-                </a:solidFill>
-                <a:latin typeface="Calibri"/>
-              </a:rPr>
-              <a:t>Inicio 8:10 pm</a:t>
-            </a:r>
-          </a:p>
-        </p:txBody>
-      </p:sp>
-      <p:sp>
-        <p:nvSpPr>
-          <p:cNvPr id="7" name="TextBox 6"/>
-          <p:cNvSpPr txBox="1"/>
-          <p:nvPr/>
-        </p:nvSpPr>
-        <p:spPr>
-          <a:xfrm>
             <a:off x="11094415" y="6446520"/>
             <a:ext cx="548640" cy="274320"/>
           </a:xfrm>
@@ -9631,41 +9176,6 @@
         </p:nvSpPr>
         <p:spPr>
           <a:xfrm>
-            <a:off x="2194560" y="6446520"/>
-            <a:ext cx="5943600" cy="274320"/>
-          </a:xfrm>
-          <a:prstGeom prst="rect">
-            <a:avLst/>
-          </a:prstGeom>
-          <a:noFill/>
-        </p:spPr>
-        <p:txBody>
-          <a:bodyPr wrap="square" anchor="t" lIns="0" rIns="0" tIns="0" bIns="0">
-            <a:spAutoFit/>
-          </a:bodyPr>
-          <a:lstStyle/>
-          <a:p>
-            <a:pPr algn="l"/>
-            <a:r>
-              <a:rPr sz="1000" b="1" i="0">
-                <a:solidFill>
-                  <a:srgbClr val="8F989D"/>
-                </a:solidFill>
-                <a:latin typeface="Calibri"/>
-              </a:rPr>
-              <a:t>Inicio 8:10 pm</a:t>
-            </a:r>
-          </a:p>
-        </p:txBody>
-      </p:sp>
-      <p:sp>
-        <p:nvSpPr>
-          <p:cNvPr id="6" name="TextBox 5"/>
-          <p:cNvSpPr txBox="1"/>
-          <p:nvPr/>
-        </p:nvSpPr>
-        <p:spPr>
-          <a:xfrm>
             <a:off x="11094415" y="6446520"/>
             <a:ext cx="548640" cy="274320"/>
           </a:xfrm>
@@ -9695,7 +9205,7 @@
       </p:sp>
       <p:sp>
         <p:nvSpPr>
-          <p:cNvPr id="7" name="TextBox 6"/>
+          <p:cNvPr id="6" name="TextBox 5"/>
           <p:cNvSpPr txBox="1"/>
           <p:nvPr/>
         </p:nvSpPr>
@@ -10296,41 +9806,6 @@
         </p:nvSpPr>
         <p:spPr>
           <a:xfrm>
-            <a:off x="2194560" y="6446520"/>
-            <a:ext cx="5943600" cy="274320"/>
-          </a:xfrm>
-          <a:prstGeom prst="rect">
-            <a:avLst/>
-          </a:prstGeom>
-          <a:noFill/>
-        </p:spPr>
-        <p:txBody>
-          <a:bodyPr wrap="square" anchor="t" lIns="0" rIns="0" tIns="0" bIns="0">
-            <a:spAutoFit/>
-          </a:bodyPr>
-          <a:lstStyle/>
-          <a:p>
-            <a:pPr algn="l"/>
-            <a:r>
-              <a:rPr sz="1000" b="1" i="0">
-                <a:solidFill>
-                  <a:srgbClr val="8F989D"/>
-                </a:solidFill>
-                <a:latin typeface="Calibri"/>
-              </a:rPr>
-              <a:t>Inicio 8:10 pm</a:t>
-            </a:r>
-          </a:p>
-        </p:txBody>
-      </p:sp>
-      <p:sp>
-        <p:nvSpPr>
-          <p:cNvPr id="7" name="TextBox 6"/>
-          <p:cNvSpPr txBox="1"/>
-          <p:nvPr/>
-        </p:nvSpPr>
-        <p:spPr>
-          <a:xfrm>
             <a:off x="11094415" y="6446520"/>
             <a:ext cx="548640" cy="274320"/>
           </a:xfrm>
@@ -10748,41 +10223,6 @@
         </p:nvSpPr>
         <p:spPr>
           <a:xfrm>
-            <a:off x="2194560" y="6446520"/>
-            <a:ext cx="5943600" cy="274320"/>
-          </a:xfrm>
-          <a:prstGeom prst="rect">
-            <a:avLst/>
-          </a:prstGeom>
-          <a:noFill/>
-        </p:spPr>
-        <p:txBody>
-          <a:bodyPr wrap="square" anchor="t" lIns="0" rIns="0" tIns="0" bIns="0">
-            <a:spAutoFit/>
-          </a:bodyPr>
-          <a:lstStyle/>
-          <a:p>
-            <a:pPr algn="l"/>
-            <a:r>
-              <a:rPr sz="1000" b="1" i="0">
-                <a:solidFill>
-                  <a:srgbClr val="8F989D"/>
-                </a:solidFill>
-                <a:latin typeface="Calibri"/>
-              </a:rPr>
-              <a:t>Inicio 8:10 pm</a:t>
-            </a:r>
-          </a:p>
-        </p:txBody>
-      </p:sp>
-      <p:sp>
-        <p:nvSpPr>
-          <p:cNvPr id="6" name="TextBox 5"/>
-          <p:cNvSpPr txBox="1"/>
-          <p:nvPr/>
-        </p:nvSpPr>
-        <p:spPr>
-          <a:xfrm>
             <a:off x="11094415" y="6446520"/>
             <a:ext cx="548640" cy="274320"/>
           </a:xfrm>
@@ -10812,7 +10252,7 @@
       </p:sp>
       <p:sp>
         <p:nvSpPr>
-          <p:cNvPr id="7" name="TextBox 6"/>
+          <p:cNvPr id="6" name="TextBox 5"/>
           <p:cNvSpPr txBox="1"/>
           <p:nvPr/>
         </p:nvSpPr>
@@ -11225,41 +10665,6 @@
         </p:nvSpPr>
         <p:spPr>
           <a:xfrm>
-            <a:off x="2194560" y="6446520"/>
-            <a:ext cx="5943600" cy="274320"/>
-          </a:xfrm>
-          <a:prstGeom prst="rect">
-            <a:avLst/>
-          </a:prstGeom>
-          <a:noFill/>
-        </p:spPr>
-        <p:txBody>
-          <a:bodyPr wrap="square" anchor="t" lIns="0" rIns="0" tIns="0" bIns="0">
-            <a:spAutoFit/>
-          </a:bodyPr>
-          <a:lstStyle/>
-          <a:p>
-            <a:pPr algn="l"/>
-            <a:r>
-              <a:rPr sz="1000" b="1" i="0">
-                <a:solidFill>
-                  <a:srgbClr val="8F989D"/>
-                </a:solidFill>
-                <a:latin typeface="Calibri"/>
-              </a:rPr>
-              <a:t>Inicio 8:10 pm</a:t>
-            </a:r>
-          </a:p>
-        </p:txBody>
-      </p:sp>
-      <p:sp>
-        <p:nvSpPr>
-          <p:cNvPr id="6" name="TextBox 5"/>
-          <p:cNvSpPr txBox="1"/>
-          <p:nvPr/>
-        </p:nvSpPr>
-        <p:spPr>
-          <a:xfrm>
             <a:off x="11094415" y="6446520"/>
             <a:ext cx="548640" cy="274320"/>
           </a:xfrm>
@@ -11289,7 +10694,7 @@
       </p:sp>
       <p:sp>
         <p:nvSpPr>
-          <p:cNvPr id="7" name="TextBox 6"/>
+          <p:cNvPr id="6" name="TextBox 5"/>
           <p:cNvSpPr txBox="1"/>
           <p:nvPr/>
         </p:nvSpPr>
@@ -11850,41 +11255,6 @@
         </p:nvSpPr>
         <p:spPr>
           <a:xfrm>
-            <a:off x="2194560" y="6446520"/>
-            <a:ext cx="5943600" cy="274320"/>
-          </a:xfrm>
-          <a:prstGeom prst="rect">
-            <a:avLst/>
-          </a:prstGeom>
-          <a:noFill/>
-        </p:spPr>
-        <p:txBody>
-          <a:bodyPr wrap="square" anchor="t" lIns="0" rIns="0" tIns="0" bIns="0">
-            <a:spAutoFit/>
-          </a:bodyPr>
-          <a:lstStyle/>
-          <a:p>
-            <a:pPr algn="l"/>
-            <a:r>
-              <a:rPr sz="1000" b="1" i="0">
-                <a:solidFill>
-                  <a:srgbClr val="8F989D"/>
-                </a:solidFill>
-                <a:latin typeface="Calibri"/>
-              </a:rPr>
-              <a:t>Inicio 8:10 pm</a:t>
-            </a:r>
-          </a:p>
-        </p:txBody>
-      </p:sp>
-      <p:sp>
-        <p:nvSpPr>
-          <p:cNvPr id="7" name="TextBox 6"/>
-          <p:cNvSpPr txBox="1"/>
-          <p:nvPr/>
-        </p:nvSpPr>
-        <p:spPr>
-          <a:xfrm>
             <a:off x="11094415" y="6446520"/>
             <a:ext cx="548640" cy="274320"/>
           </a:xfrm>

--- a/Especializacion/Proyecto I/Clases/Sesion 06 - Marco conceptual y marco contextual/Presentacion.pptx
+++ b/Especializacion/Proyecto I/Clases/Sesion 06 - Marco conceptual y marco contextual/Presentacion.pptx
@@ -23,6 +23,8 @@
     <p:sldId id="271" r:id="rId22"/>
     <p:sldId id="272" r:id="rId23"/>
     <p:sldId id="273" r:id="rId24"/>
+    <p:sldId id="274" r:id="rId25"/>
+    <p:sldId id="275" r:id="rId26"/>
   </p:sldIdLst>
   <p:sldSz cx="12191695" cy="6858000" type="screen4x3"/>
   <p:notesSz cx="6858000" cy="9144000"/>
@@ -5425,7 +5427,7 @@
                 </a:solidFill>
                 <a:latin typeface="Calibri"/>
               </a:rPr>
-              <a:t>Todo desde el navegador y sin costo: Google Docs para el documento, ZoteroBib para las citas nuevas. [URL CDigital — campus del curso pendiente]</a:t>
+              <a:t>Todo desde el navegador y sin costo: Google Docs para el documento, ZoteroBib para las citas nuevas. https://cdigital.cun.edu.co/course/view.php?id=130378</a:t>
             </a:r>
           </a:p>
         </p:txBody>
@@ -5530,7 +5532,7 @@
                 </a:solidFill>
                 <a:latin typeface="Calibri"/>
               </a:rPr>
-              <a:t>TALLER (22 minutos) — definiciones operativas y contexto</a:t>
+              <a:t>TALLER · Definiciones operativas y contexto</a:t>
             </a:r>
           </a:p>
         </p:txBody>
@@ -5543,8 +5545,8 @@
         </p:nvSpPr>
         <p:spPr>
           <a:xfrm>
-            <a:off x="640080" y="1691639"/>
-            <a:ext cx="10911535" cy="4617720"/>
+            <a:off x="640080" y="1280160"/>
+            <a:ext cx="10911535" cy="411480"/>
           </a:xfrm>
           <a:prstGeom prst="rect">
             <a:avLst/>
@@ -5557,6 +5559,41 @@
           </a:bodyPr>
           <a:lstStyle/>
           <a:p>
+            <a:pPr algn="ctr"/>
+            <a:r>
+              <a:rPr sz="1500" b="0" i="0">
+                <a:solidFill>
+                  <a:srgbClr val="2B2B2B"/>
+                </a:solidFill>
+                <a:latin typeface="Calibri"/>
+              </a:rPr>
+              <a:t>Por equipos · prioridad para los equipos que no logren ponerle umbral a sus definiciones</a:t>
+            </a:r>
+          </a:p>
+        </p:txBody>
+      </p:sp>
+      <p:sp>
+        <p:nvSpPr>
+          <p:cNvPr id="5" name="TextBox 4"/>
+          <p:cNvSpPr txBox="1"/>
+          <p:nvPr/>
+        </p:nvSpPr>
+        <p:spPr>
+          <a:xfrm>
+            <a:off x="640080" y="2011679"/>
+            <a:ext cx="10911535" cy="4297680"/>
+          </a:xfrm>
+          <a:prstGeom prst="rect">
+            <a:avLst/>
+          </a:prstGeom>
+          <a:noFill/>
+        </p:spPr>
+        <p:txBody>
+          <a:bodyPr wrap="square" anchor="t" lIns="0" rIns="0" tIns="0" bIns="0">
+            <a:spAutoFit/>
+          </a:bodyPr>
+          <a:lstStyle/>
+          <a:p>
             <a:pPr>
               <a:spcAft>
                 <a:spcPts val="1000"/>
@@ -5578,7 +5615,7 @@
                 </a:solidFill>
                 <a:latin typeface="Calibri"/>
               </a:rPr>
-              <a:t>Consigna literal:</a:t>
+              <a:t>Al final tiene:</a:t>
             </a:r>
             <a:r>
               <a:rPr sz="1600" b="0" i="0">
@@ -5587,111 +5624,7 @@
                 </a:solidFill>
                 <a:latin typeface="Calibri"/>
               </a:rPr>
-              <a:t> 22 minutos, dos productos en el documento del equipo.</a:t>
-            </a:r>
-          </a:p>
-          <a:p>
-            <a:pPr lvl="1">
-              <a:spcAft>
-                <a:spcPts val="600"/>
-              </a:spcAft>
-            </a:pPr>
-            <a:r>
-              <a:rPr sz="1500" b="0" i="0">
-                <a:solidFill>
-                  <a:srgbClr val="2B2B2B"/>
-                </a:solidFill>
-                <a:latin typeface="Calibri"/>
-              </a:rPr>
-              <a:t>●   </a:t>
-            </a:r>
-            <a:r>
-              <a:rPr sz="1500" b="1" i="0">
-                <a:solidFill>
-                  <a:srgbClr val="2B2B2B"/>
-                </a:solidFill>
-                <a:latin typeface="Calibri"/>
-              </a:rPr>
-              <a:t>(1)</a:t>
-            </a:r>
-            <a:r>
-              <a:rPr sz="1500" b="0" i="0">
-                <a:solidFill>
-                  <a:srgbClr val="2B2B2B"/>
-                </a:solidFill>
-                <a:latin typeface="Calibri"/>
-              </a:rPr>
-              <a:t> La tabla conceptual con </a:t>
-            </a:r>
-            <a:r>
-              <a:rPr sz="1500" b="1" i="0">
-                <a:solidFill>
-                  <a:srgbClr val="2B2B2B"/>
-                </a:solidFill>
-                <a:latin typeface="Calibri"/>
-              </a:rPr>
-              <a:t>cuatro a seis términos</a:t>
-            </a:r>
-            <a:r>
-              <a:rPr sz="1500" b="0" i="0">
-                <a:solidFill>
-                  <a:srgbClr val="2B2B2B"/>
-                </a:solidFill>
-                <a:latin typeface="Calibri"/>
-              </a:rPr>
-              <a:t> y las cuatro columnas completas.</a:t>
-            </a:r>
-          </a:p>
-          <a:p>
-            <a:pPr lvl="1">
-              <a:spcAft>
-                <a:spcPts val="600"/>
-              </a:spcAft>
-            </a:pPr>
-            <a:r>
-              <a:rPr sz="1500" b="0" i="0">
-                <a:solidFill>
-                  <a:srgbClr val="2B2B2B"/>
-                </a:solidFill>
-                <a:latin typeface="Calibri"/>
-              </a:rPr>
-              <a:t>●   </a:t>
-            </a:r>
-            <a:r>
-              <a:rPr sz="1500" b="1" i="0">
-                <a:solidFill>
-                  <a:srgbClr val="2B2B2B"/>
-                </a:solidFill>
-                <a:latin typeface="Calibri"/>
-              </a:rPr>
-              <a:t>(2)</a:t>
-            </a:r>
-            <a:r>
-              <a:rPr sz="1500" b="0" i="0">
-                <a:solidFill>
-                  <a:srgbClr val="2B2B2B"/>
-                </a:solidFill>
-                <a:latin typeface="Calibri"/>
-              </a:rPr>
-              <a:t> Una página de </a:t>
-            </a:r>
-            <a:r>
-              <a:rPr sz="1500" b="1" i="0">
-                <a:solidFill>
-                  <a:srgbClr val="2B2B2B"/>
-                </a:solidFill>
-                <a:latin typeface="Calibri"/>
-              </a:rPr>
-              <a:t>marco contextual</a:t>
-            </a:r>
-            <a:r>
-              <a:rPr sz="1500" b="0" i="0">
-                <a:solidFill>
-                  <a:srgbClr val="2B2B2B"/>
-                </a:solidFill>
-                <a:latin typeface="Calibri"/>
-              </a:rPr>
-              <a:t>: organización o aula, proceso, actores, ritmos y restricciones.</a:t>
+              <a:t> la tabla conceptual de cuatro a seis términos y una página de marco contextual.</a:t>
             </a:r>
           </a:p>
           <a:p>
@@ -5707,7 +5640,61 @@
                 </a:solidFill>
                 <a:latin typeface="Calibri"/>
               </a:rPr>
-              <a:t>–   Los términos se toman de la pregunta y de los objetivos: si un término no aparece allí, no va en la tabla.</a:t>
+              <a:t>–   </a:t>
+            </a:r>
+            <a:r>
+              <a:rPr sz="1600" b="1" i="0">
+                <a:solidFill>
+                  <a:srgbClr val="2B2B2B"/>
+                </a:solidFill>
+                <a:latin typeface="Calibri"/>
+              </a:rPr>
+              <a:t>Paso 1</a:t>
+            </a:r>
+            <a:r>
+              <a:rPr sz="1600" b="0" i="0">
+                <a:solidFill>
+                  <a:srgbClr val="2B2B2B"/>
+                </a:solidFill>
+                <a:latin typeface="Calibri"/>
+              </a:rPr>
+              <a:t> · La </a:t>
+            </a:r>
+            <a:r>
+              <a:rPr sz="1600" b="1" i="0">
+                <a:solidFill>
+                  <a:srgbClr val="2B2B2B"/>
+                </a:solidFill>
+                <a:latin typeface="Calibri"/>
+              </a:rPr>
+              <a:t>tabla conceptual</a:t>
+            </a:r>
+            <a:r>
+              <a:rPr sz="1600" b="0" i="0">
+                <a:solidFill>
+                  <a:srgbClr val="2B2B2B"/>
+                </a:solidFill>
+                <a:latin typeface="Calibri"/>
+              </a:rPr>
+              <a:t> con </a:t>
+            </a:r>
+            <a:r>
+              <a:rPr sz="1600" b="1" i="0">
+                <a:solidFill>
+                  <a:srgbClr val="2B2B2B"/>
+                </a:solidFill>
+                <a:latin typeface="Calibri"/>
+              </a:rPr>
+              <a:t>cuatro a seis términos</a:t>
+            </a:r>
+            <a:r>
+              <a:rPr sz="1600" b="0" i="0">
+                <a:solidFill>
+                  <a:srgbClr val="2B2B2B"/>
+                </a:solidFill>
+                <a:latin typeface="Calibri"/>
+              </a:rPr>
+              <a:t> y las cuatro columnas completas. Los términos se toman de la pregunta y de los objetivos: si un término no aparece allí, no va en la tabla.</a:t>
             </a:r>
           </a:p>
           <a:p>
@@ -5723,7 +5710,43 @@
                 </a:solidFill>
                 <a:latin typeface="Calibri"/>
               </a:rPr>
-              <a:t>–   El Docente circula; prioridad para los equipos que no logren ponerle umbral a sus definiciones.</a:t>
+              <a:t>–   </a:t>
+            </a:r>
+            <a:r>
+              <a:rPr sz="1600" b="1" i="0">
+                <a:solidFill>
+                  <a:srgbClr val="2B2B2B"/>
+                </a:solidFill>
+                <a:latin typeface="Calibri"/>
+              </a:rPr>
+              <a:t>Paso 2</a:t>
+            </a:r>
+            <a:r>
+              <a:rPr sz="1600" b="0" i="0">
+                <a:solidFill>
+                  <a:srgbClr val="2B2B2B"/>
+                </a:solidFill>
+                <a:latin typeface="Calibri"/>
+              </a:rPr>
+              <a:t> · Una página de </a:t>
+            </a:r>
+            <a:r>
+              <a:rPr sz="1600" b="1" i="0">
+                <a:solidFill>
+                  <a:srgbClr val="2B2B2B"/>
+                </a:solidFill>
+                <a:latin typeface="Calibri"/>
+              </a:rPr>
+              <a:t>marco contextual</a:t>
+            </a:r>
+            <a:r>
+              <a:rPr sz="1600" b="0" i="0">
+                <a:solidFill>
+                  <a:srgbClr val="2B2B2B"/>
+                </a:solidFill>
+                <a:latin typeface="Calibri"/>
+              </a:rPr>
+              <a:t>: organización o aula, proceso, actores, ritmos y restricciones.</a:t>
             </a:r>
           </a:p>
           <a:p>
@@ -5748,7 +5771,7 @@
                 </a:solidFill>
                 <a:latin typeface="Calibri"/>
               </a:rPr>
-              <a:t>Criterio de éxito (verificable):</a:t>
+              <a:t>En clase, sin falta:</a:t>
             </a:r>
             <a:r>
               <a:rPr sz="1600" b="0" i="0">
@@ -5757,31 +5780,17 @@
                 </a:solidFill>
                 <a:latin typeface="Calibri"/>
               </a:rPr>
-              <a:t> ningún término admite dos interpretaciones y cada dato de contexto se puede vincular a una decisión del método.</a:t>
-            </a:r>
-          </a:p>
-          <a:p>
-            <a:pPr lvl="1">
-              <a:spcAft>
-                <a:spcPts val="600"/>
-              </a:spcAft>
-            </a:pPr>
-            <a:r>
-              <a:rPr sz="1500" b="0" i="0">
-                <a:solidFill>
-                  <a:srgbClr val="2B2B2B"/>
-                </a:solidFill>
-                <a:latin typeface="Calibri"/>
-              </a:rPr>
-              <a:t>●   Prueba en voz alta: el Docente lee una definición del equipo vecino y pregunta “¿esto cuenta o no cuenta?”. Debe haber una sola respuesta posible.</a:t>
-            </a:r>
-          </a:p>
-          <a:p>
-            <a:pPr>
-              <a:spcAft>
-                <a:spcPts val="1000"/>
-              </a:spcAft>
-            </a:pPr>
+              <a:t> el </a:t>
+            </a:r>
+            <a:r>
+              <a:rPr sz="1600" b="1" i="0">
+                <a:solidFill>
+                  <a:srgbClr val="2B2B2B"/>
+                </a:solidFill>
+                <a:latin typeface="Calibri"/>
+              </a:rPr>
+              <a:t>paso 1</a:t>
+            </a:r>
             <a:r>
               <a:rPr sz="1600" b="0" i="0">
                 <a:solidFill>
@@ -5789,32 +5798,14 @@
                 </a:solidFill>
                 <a:latin typeface="Calibri"/>
               </a:rPr>
-              <a:t>–   Suban el avance como </a:t>
-            </a:r>
-            <a:r>
-              <a:rPr sz="1600" b="1" i="0">
-                <a:solidFill>
-                  <a:srgbClr val="2B2B2B"/>
-                </a:solidFill>
-                <a:latin typeface="Calibri"/>
-              </a:rPr>
-              <a:t>S06_ConceptualContextual_Apellidos</a:t>
-            </a:r>
-            <a:r>
-              <a:rPr sz="1600" b="0" i="0">
-                <a:solidFill>
-                  <a:srgbClr val="2B2B2B"/>
-                </a:solidFill>
-                <a:latin typeface="Calibri"/>
-              </a:rPr>
-              <a:t>.</a:t>
-            </a:r>
-          </a:p>
-        </p:txBody>
-      </p:sp>
-      <p:sp>
-        <p:nvSpPr>
-          <p:cNvPr id="5" name="TextBox 4"/>
+              <a:t>. Del 2 en adelante puede quedar en trabajo autónomo, pero antes de la próxima sesión.</a:t>
+            </a:r>
+          </a:p>
+        </p:txBody>
+      </p:sp>
+      <p:sp>
+        <p:nvSpPr>
+          <p:cNvPr id="6" name="TextBox 5"/>
           <p:cNvSpPr txBox="1"/>
           <p:nvPr/>
         </p:nvSpPr>
@@ -5849,7 +5840,7 @@
       </p:sp>
       <p:sp>
         <p:nvSpPr>
-          <p:cNvPr id="6" name="TextBox 5"/>
+          <p:cNvPr id="7" name="TextBox 6"/>
           <p:cNvSpPr txBox="1"/>
           <p:nvPr/>
         </p:nvSpPr>
@@ -5876,7 +5867,7 @@
                 </a:solidFill>
                 <a:latin typeface="Calibri"/>
               </a:rPr>
-              <a:t>Prohibido en este taller: definiciones copiadas de un diccionario y párrafos de contexto que empiecen por “en el mundo actual…”.</a:t>
+              <a:t>Prohibido en este taller: definiciones copiadas de un diccionario y párrafos de contexto que empiecen por «en el mundo actual…».</a:t>
             </a:r>
           </a:p>
         </p:txBody>
@@ -5890,6 +5881,523 @@
 </file>
 
 <file path=ppt/slides/slide16.xml><?xml version="1.0" encoding="utf-8"?>
+<p:sld xmlns:a="http://schemas.openxmlformats.org/drawingml/2006/main" xmlns:p="http://schemas.openxmlformats.org/presentationml/2006/main" xmlns:r="http://schemas.openxmlformats.org/officeDocument/2006/relationships">
+  <p:cSld>
+    <p:bg>
+      <p:bgPr>
+        <a:solidFill>
+          <a:srgbClr val="FFFFFF"/>
+        </a:solidFill>
+        <a:effectLst/>
+      </p:bgPr>
+    </p:bg>
+    <p:spTree>
+      <p:nvGrpSpPr>
+        <p:cNvPr id="1" name=""/>
+        <p:cNvGrpSpPr/>
+        <p:nvPr/>
+      </p:nvGrpSpPr>
+      <p:grpSpPr/>
+      <p:sp>
+        <p:nvSpPr>
+          <p:cNvPr id="2" name="Rectangle 1"/>
+          <p:cNvSpPr/>
+          <p:nvPr/>
+        </p:nvSpPr>
+        <p:spPr>
+          <a:xfrm>
+            <a:off x="0" y="0"/>
+            <a:ext cx="12191695" cy="1188720"/>
+          </a:xfrm>
+          <a:prstGeom prst="rect">
+            <a:avLst/>
+          </a:prstGeom>
+          <a:solidFill>
+            <a:srgbClr val="0C2340"/>
+          </a:solidFill>
+          <a:ln>
+            <a:noFill/>
+          </a:ln>
+          <a:effectLst/>
+        </p:spPr>
+        <p:style>
+          <a:lnRef idx="1">
+            <a:schemeClr val="accent1"/>
+          </a:lnRef>
+          <a:fillRef idx="3">
+            <a:schemeClr val="accent1"/>
+          </a:fillRef>
+          <a:effectRef idx="2">
+            <a:schemeClr val="accent1"/>
+          </a:effectRef>
+          <a:fontRef idx="minor">
+            <a:schemeClr val="lt1"/>
+          </a:fontRef>
+        </p:style>
+        <p:txBody>
+          <a:bodyPr rtlCol="0" anchor="ctr"/>
+          <a:lstStyle/>
+          <a:p>
+            <a:pPr algn="ctr"/>
+          </a:p>
+        </p:txBody>
+      </p:sp>
+      <p:sp>
+        <p:nvSpPr>
+          <p:cNvPr id="3" name="TextBox 2"/>
+          <p:cNvSpPr txBox="1"/>
+          <p:nvPr/>
+        </p:nvSpPr>
+        <p:spPr>
+          <a:xfrm>
+            <a:off x="640080" y="0"/>
+            <a:ext cx="9082735" cy="1188720"/>
+          </a:xfrm>
+          <a:prstGeom prst="rect">
+            <a:avLst/>
+          </a:prstGeom>
+          <a:noFill/>
+        </p:spPr>
+        <p:txBody>
+          <a:bodyPr wrap="square" anchor="ctr" lIns="0" rIns="0" tIns="0" bIns="0">
+            <a:spAutoFit/>
+          </a:bodyPr>
+          <a:lstStyle/>
+          <a:p>
+            <a:pPr algn="ctr"/>
+            <a:r>
+              <a:rPr sz="2600" b="1" i="0">
+                <a:solidFill>
+                  <a:srgbClr val="FFFFFF"/>
+                </a:solidFill>
+                <a:latin typeface="Calibri"/>
+              </a:rPr>
+              <a:t>TALLER · cómo se revisa y dónde se entrega</a:t>
+            </a:r>
+          </a:p>
+        </p:txBody>
+      </p:sp>
+      <p:sp>
+        <p:nvSpPr>
+          <p:cNvPr id="4" name="TextBox 3"/>
+          <p:cNvSpPr txBox="1"/>
+          <p:nvPr/>
+        </p:nvSpPr>
+        <p:spPr>
+          <a:xfrm>
+            <a:off x="640080" y="1280160"/>
+            <a:ext cx="10911535" cy="411480"/>
+          </a:xfrm>
+          <a:prstGeom prst="rect">
+            <a:avLst/>
+          </a:prstGeom>
+          <a:noFill/>
+        </p:spPr>
+        <p:txBody>
+          <a:bodyPr wrap="square" anchor="t" lIns="0" rIns="0" tIns="0" bIns="0">
+            <a:spAutoFit/>
+          </a:bodyPr>
+          <a:lstStyle/>
+          <a:p>
+            <a:pPr algn="ctr"/>
+            <a:r>
+              <a:rPr sz="1500" b="0" i="0">
+                <a:solidFill>
+                  <a:srgbClr val="2B2B2B"/>
+                </a:solidFill>
+                <a:latin typeface="Calibri"/>
+              </a:rPr>
+              <a:t>Definiciones operativas y contexto</a:t>
+            </a:r>
+          </a:p>
+        </p:txBody>
+      </p:sp>
+      <p:sp>
+        <p:nvSpPr>
+          <p:cNvPr id="5" name="TextBox 4"/>
+          <p:cNvSpPr txBox="1"/>
+          <p:nvPr/>
+        </p:nvSpPr>
+        <p:spPr>
+          <a:xfrm>
+            <a:off x="640080" y="2011679"/>
+            <a:ext cx="10911535" cy="4297680"/>
+          </a:xfrm>
+          <a:prstGeom prst="rect">
+            <a:avLst/>
+          </a:prstGeom>
+          <a:noFill/>
+        </p:spPr>
+        <p:txBody>
+          <a:bodyPr wrap="square" anchor="t" lIns="0" rIns="0" tIns="0" bIns="0">
+            <a:spAutoFit/>
+          </a:bodyPr>
+          <a:lstStyle/>
+          <a:p>
+            <a:pPr>
+              <a:spcAft>
+                <a:spcPts val="1000"/>
+              </a:spcAft>
+            </a:pPr>
+            <a:r>
+              <a:rPr sz="1600" b="0" i="0">
+                <a:solidFill>
+                  <a:srgbClr val="2B2B2B"/>
+                </a:solidFill>
+                <a:latin typeface="Calibri"/>
+              </a:rPr>
+              <a:t>–   </a:t>
+            </a:r>
+            <a:r>
+              <a:rPr sz="1600" b="1" i="0">
+                <a:solidFill>
+                  <a:srgbClr val="2B2B2B"/>
+                </a:solidFill>
+                <a:latin typeface="Calibri"/>
+              </a:rPr>
+              <a:t>Quedó bien si</a:t>
+            </a:r>
+            <a:r>
+              <a:rPr sz="1600" b="0" i="0">
+                <a:solidFill>
+                  <a:srgbClr val="2B2B2B"/>
+                </a:solidFill>
+                <a:latin typeface="Calibri"/>
+              </a:rPr>
+              <a:t> —compruébelo usted antes de cerrar el documento—:</a:t>
+            </a:r>
+          </a:p>
+          <a:p>
+            <a:pPr lvl="1">
+              <a:spcAft>
+                <a:spcPts val="600"/>
+              </a:spcAft>
+            </a:pPr>
+            <a:r>
+              <a:rPr sz="1500" b="0" i="0">
+                <a:solidFill>
+                  <a:srgbClr val="2B2B2B"/>
+                </a:solidFill>
+                <a:latin typeface="Calibri"/>
+              </a:rPr>
+              <a:t>●   </a:t>
+            </a:r>
+            <a:r>
+              <a:rPr sz="1500" b="1" i="0">
+                <a:solidFill>
+                  <a:srgbClr val="2B2B2B"/>
+                </a:solidFill>
+                <a:latin typeface="Calibri"/>
+              </a:rPr>
+              <a:t>Ningún término admite dos interpretaciones.</a:t>
+            </a:r>
+          </a:p>
+          <a:p>
+            <a:pPr lvl="1">
+              <a:spcAft>
+                <a:spcPts val="600"/>
+              </a:spcAft>
+            </a:pPr>
+            <a:r>
+              <a:rPr sz="1500" b="0" i="0">
+                <a:solidFill>
+                  <a:srgbClr val="2B2B2B"/>
+                </a:solidFill>
+                <a:latin typeface="Calibri"/>
+              </a:rPr>
+              <a:t>●   Cada dato de contexto se puede vincular a </a:t>
+            </a:r>
+            <a:r>
+              <a:rPr sz="1500" b="1" i="0">
+                <a:solidFill>
+                  <a:srgbClr val="2B2B2B"/>
+                </a:solidFill>
+                <a:latin typeface="Calibri"/>
+              </a:rPr>
+              <a:t>una decisión del método</a:t>
+            </a:r>
+            <a:r>
+              <a:rPr sz="1500" b="0" i="0">
+                <a:solidFill>
+                  <a:srgbClr val="2B2B2B"/>
+                </a:solidFill>
+                <a:latin typeface="Calibri"/>
+              </a:rPr>
+              <a:t>.</a:t>
+            </a:r>
+          </a:p>
+          <a:p>
+            <a:pPr lvl="1">
+              <a:spcAft>
+                <a:spcPts val="600"/>
+              </a:spcAft>
+            </a:pPr>
+            <a:r>
+              <a:rPr sz="1500" b="0" i="0">
+                <a:solidFill>
+                  <a:srgbClr val="2B2B2B"/>
+                </a:solidFill>
+                <a:latin typeface="Calibri"/>
+              </a:rPr>
+              <a:t>●   Prueba en voz alta: el Docente lee una definición del equipo vecino y pregunta «¿esto cuenta o no cuenta?». Debe haber </a:t>
+            </a:r>
+            <a:r>
+              <a:rPr sz="1500" b="1" i="0">
+                <a:solidFill>
+                  <a:srgbClr val="2B2B2B"/>
+                </a:solidFill>
+                <a:latin typeface="Calibri"/>
+              </a:rPr>
+              <a:t>una sola</a:t>
+            </a:r>
+            <a:r>
+              <a:rPr sz="1500" b="0" i="0">
+                <a:solidFill>
+                  <a:srgbClr val="2B2B2B"/>
+                </a:solidFill>
+                <a:latin typeface="Calibri"/>
+              </a:rPr>
+              <a:t> respuesta posible.</a:t>
+            </a:r>
+          </a:p>
+          <a:p>
+            <a:pPr>
+              <a:spcAft>
+                <a:spcPts val="1000"/>
+              </a:spcAft>
+            </a:pPr>
+            <a:r>
+              <a:rPr sz="1600" b="0" i="0">
+                <a:solidFill>
+                  <a:srgbClr val="2B2B2B"/>
+                </a:solidFill>
+                <a:latin typeface="Calibri"/>
+              </a:rPr>
+              <a:t>–   </a:t>
+            </a:r>
+            <a:r>
+              <a:rPr sz="1600" b="1" i="0">
+                <a:solidFill>
+                  <a:srgbClr val="2B2B2B"/>
+                </a:solidFill>
+                <a:latin typeface="Calibri"/>
+              </a:rPr>
+              <a:t>Plan B:</a:t>
+            </a:r>
+            <a:r>
+              <a:rPr sz="1600" b="0" i="0">
+                <a:solidFill>
+                  <a:srgbClr val="2B2B2B"/>
+                </a:solidFill>
+                <a:latin typeface="Calibri"/>
+              </a:rPr>
+              <a:t> Si una definición no tiene umbral, póngale un número: «alto» no sirve, «más de tres por semana» sí.</a:t>
+            </a:r>
+          </a:p>
+          <a:p>
+            <a:pPr>
+              <a:spcAft>
+                <a:spcPts val="1000"/>
+              </a:spcAft>
+            </a:pPr>
+            <a:r>
+              <a:rPr sz="1600" b="0" i="0">
+                <a:solidFill>
+                  <a:srgbClr val="2B2B2B"/>
+                </a:solidFill>
+                <a:latin typeface="Calibri"/>
+              </a:rPr>
+              <a:t>–   </a:t>
+            </a:r>
+            <a:r>
+              <a:rPr sz="1600" b="1" i="0">
+                <a:solidFill>
+                  <a:srgbClr val="2B2B2B"/>
+                </a:solidFill>
+                <a:latin typeface="Calibri"/>
+              </a:rPr>
+              <a:t>Hoy no se sube nada al aula:</a:t>
+            </a:r>
+            <a:r>
+              <a:rPr sz="1600" b="0" i="0">
+                <a:solidFill>
+                  <a:srgbClr val="2B2B2B"/>
+                </a:solidFill>
+                <a:latin typeface="Calibri"/>
+              </a:rPr>
+              <a:t> guarde `S06_ConceptualContextual_Apellidos` (Google Doc o PDF) en su Drive y tráigalo a la próxima sesión. Es un </a:t>
+            </a:r>
+            <a:r>
+              <a:rPr sz="1600" b="1" i="0">
+                <a:solidFill>
+                  <a:srgbClr val="2B2B2B"/>
+                </a:solidFill>
+                <a:latin typeface="Calibri"/>
+              </a:rPr>
+              <a:t>avance formativo</a:t>
+            </a:r>
+            <a:r>
+              <a:rPr sz="1600" b="0" i="0">
+                <a:solidFill>
+                  <a:srgbClr val="2B2B2B"/>
+                </a:solidFill>
+                <a:latin typeface="Calibri"/>
+              </a:rPr>
+              <a:t>, se revisa en clase.</a:t>
+            </a:r>
+          </a:p>
+          <a:p>
+            <a:pPr>
+              <a:spcAft>
+                <a:spcPts val="1000"/>
+              </a:spcAft>
+            </a:pPr>
+            <a:r>
+              <a:rPr sz="1600" b="0" i="0">
+                <a:solidFill>
+                  <a:srgbClr val="2B2B2B"/>
+                </a:solidFill>
+                <a:latin typeface="Calibri"/>
+              </a:rPr>
+              <a:t>–   </a:t>
+            </a:r>
+            <a:r>
+              <a:rPr sz="1600" b="1" i="0">
+                <a:solidFill>
+                  <a:srgbClr val="2B2B2B"/>
+                </a:solidFill>
+                <a:latin typeface="Calibri"/>
+              </a:rPr>
+              <a:t>Esto alimenta:</a:t>
+            </a:r>
+            <a:r>
+              <a:rPr sz="1600" b="0" i="0">
+                <a:solidFill>
+                  <a:srgbClr val="2B2B2B"/>
+                </a:solidFill>
+                <a:latin typeface="Calibri"/>
+              </a:rPr>
+              <a:t> </a:t>
+            </a:r>
+            <a:r>
+              <a:rPr sz="1600" b="1" i="0">
+                <a:solidFill>
+                  <a:srgbClr val="2B2B2B"/>
+                </a:solidFill>
+                <a:latin typeface="Calibri"/>
+              </a:rPr>
+              <a:t>ACA 1</a:t>
+            </a:r>
+            <a:r>
+              <a:rPr sz="1600" b="0" i="0">
+                <a:solidFill>
+                  <a:srgbClr val="2B2B2B"/>
+                </a:solidFill>
+                <a:latin typeface="Calibri"/>
+              </a:rPr>
+              <a:t> —tarea, 25%—, el documento que </a:t>
+            </a:r>
+            <a:r>
+              <a:rPr sz="1600" b="1" i="0">
+                <a:solidFill>
+                  <a:srgbClr val="2B2B2B"/>
+                </a:solidFill>
+                <a:latin typeface="Calibri"/>
+              </a:rPr>
+              <a:t>sí</a:t>
+            </a:r>
+            <a:r>
+              <a:rPr sz="1600" b="0" i="0">
+                <a:solidFill>
+                  <a:srgbClr val="2B2B2B"/>
+                </a:solidFill>
+                <a:latin typeface="Calibri"/>
+              </a:rPr>
+              <a:t> recibe </a:t>
+            </a:r>
+            <a:r>
+              <a:rPr sz="1600" b="1" i="0">
+                <a:solidFill>
+                  <a:srgbClr val="2B2B2B"/>
+                </a:solidFill>
+                <a:latin typeface="Calibri"/>
+              </a:rPr>
+              <a:t>CDigital</a:t>
+            </a:r>
+            <a:r>
+              <a:rPr sz="1600" b="0" i="0">
+                <a:solidFill>
+                  <a:srgbClr val="2B2B2B"/>
+                </a:solidFill>
+                <a:latin typeface="Calibri"/>
+              </a:rPr>
+              <a:t>; cierra en la semana de la </a:t>
+            </a:r>
+            <a:r>
+              <a:rPr sz="1600" b="1" i="0">
+                <a:solidFill>
+                  <a:srgbClr val="2B2B2B"/>
+                </a:solidFill>
+                <a:latin typeface="Calibri"/>
+              </a:rPr>
+              <a:t>Sesión 07</a:t>
+            </a:r>
+            <a:r>
+              <a:rPr sz="1600" b="0" i="0">
+                <a:solidFill>
+                  <a:srgbClr val="2B2B2B"/>
+                </a:solidFill>
+                <a:latin typeface="Calibri"/>
+              </a:rPr>
+              <a:t>.</a:t>
+            </a:r>
+          </a:p>
+        </p:txBody>
+      </p:sp>
+      <p:sp>
+        <p:nvSpPr>
+          <p:cNvPr id="6" name="TextBox 5"/>
+          <p:cNvSpPr txBox="1"/>
+          <p:nvPr/>
+        </p:nvSpPr>
+        <p:spPr>
+          <a:xfrm>
+            <a:off x="11094415" y="6446520"/>
+            <a:ext cx="548640" cy="274320"/>
+          </a:xfrm>
+          <a:prstGeom prst="rect">
+            <a:avLst/>
+          </a:prstGeom>
+          <a:noFill/>
+        </p:spPr>
+        <p:txBody>
+          <a:bodyPr wrap="square" anchor="t" lIns="0" rIns="0" tIns="0" bIns="0">
+            <a:spAutoFit/>
+          </a:bodyPr>
+          <a:lstStyle/>
+          <a:p>
+            <a:pPr algn="r"/>
+            <a:r>
+              <a:rPr sz="1000" b="1" i="0">
+                <a:solidFill>
+                  <a:srgbClr val="8F989D"/>
+                </a:solidFill>
+                <a:latin typeface="Calibri"/>
+              </a:rPr>
+              <a:t>16</a:t>
+            </a:r>
+          </a:p>
+        </p:txBody>
+      </p:sp>
+    </p:spTree>
+  </p:cSld>
+  <p:clrMapOvr>
+    <a:masterClrMapping/>
+  </p:clrMapOvr>
+</p:sld>
+</file>
+
+<file path=ppt/slides/slide17.xml><?xml version="1.0" encoding="utf-8"?>
 <p:sld xmlns:a="http://schemas.openxmlformats.org/drawingml/2006/main" xmlns:p="http://schemas.openxmlformats.org/presentationml/2006/main" xmlns:r="http://schemas.openxmlformats.org/officeDocument/2006/relationships">
   <p:cSld>
     <p:bg>
@@ -6716,7 +7224,7 @@
                 </a:solidFill>
                 <a:latin typeface="Calibri"/>
               </a:rPr>
-              <a:t>16</a:t>
+              <a:t>17</a:t>
             </a:r>
           </a:p>
         </p:txBody>
@@ -6729,7 +7237,7 @@
 </p:sld>
 </file>
 
-<file path=ppt/slides/slide17.xml><?xml version="1.0" encoding="utf-8"?>
+<file path=ppt/slides/slide18.xml><?xml version="1.0" encoding="utf-8"?>
 <p:sld xmlns:a="http://schemas.openxmlformats.org/drawingml/2006/main" xmlns:p="http://schemas.openxmlformats.org/presentationml/2006/main" xmlns:r="http://schemas.openxmlformats.org/officeDocument/2006/relationships">
   <p:cSld>
     <p:bg>
@@ -7151,7 +7659,7 @@
                 </a:solidFill>
                 <a:latin typeface="Calibri"/>
               </a:rPr>
-              <a:t>17</a:t>
+              <a:t>18</a:t>
             </a:r>
           </a:p>
         </p:txBody>
@@ -7198,7 +7706,1239 @@
 </p:sld>
 </file>
 
-<file path=ppt/slides/slide18.xml><?xml version="1.0" encoding="utf-8"?>
+<file path=ppt/slides/slide19.xml><?xml version="1.0" encoding="utf-8"?>
+<p:sld xmlns:a="http://schemas.openxmlformats.org/drawingml/2006/main" xmlns:p="http://schemas.openxmlformats.org/presentationml/2006/main" xmlns:r="http://schemas.openxmlformats.org/officeDocument/2006/relationships">
+  <p:cSld>
+    <p:bg>
+      <p:bgPr>
+        <a:solidFill>
+          <a:srgbClr val="FFFFFF"/>
+        </a:solidFill>
+        <a:effectLst/>
+      </p:bgPr>
+    </p:bg>
+    <p:spTree>
+      <p:nvGrpSpPr>
+        <p:cNvPr id="1" name=""/>
+        <p:cNvGrpSpPr/>
+        <p:nvPr/>
+      </p:nvGrpSpPr>
+      <p:grpSpPr/>
+      <p:sp>
+        <p:nvSpPr>
+          <p:cNvPr id="2" name="Rectangle 1"/>
+          <p:cNvSpPr/>
+          <p:nvPr/>
+        </p:nvSpPr>
+        <p:spPr>
+          <a:xfrm>
+            <a:off x="0" y="0"/>
+            <a:ext cx="12191695" cy="1188720"/>
+          </a:xfrm>
+          <a:prstGeom prst="rect">
+            <a:avLst/>
+          </a:prstGeom>
+          <a:solidFill>
+            <a:srgbClr val="0C2340"/>
+          </a:solidFill>
+          <a:ln>
+            <a:noFill/>
+          </a:ln>
+          <a:effectLst/>
+        </p:spPr>
+        <p:style>
+          <a:lnRef idx="1">
+            <a:schemeClr val="accent1"/>
+          </a:lnRef>
+          <a:fillRef idx="3">
+            <a:schemeClr val="accent1"/>
+          </a:fillRef>
+          <a:effectRef idx="2">
+            <a:schemeClr val="accent1"/>
+          </a:effectRef>
+          <a:fontRef idx="minor">
+            <a:schemeClr val="lt1"/>
+          </a:fontRef>
+        </p:style>
+        <p:txBody>
+          <a:bodyPr rtlCol="0" anchor="ctr"/>
+          <a:lstStyle/>
+          <a:p>
+            <a:pPr algn="ctr"/>
+          </a:p>
+        </p:txBody>
+      </p:sp>
+      <p:sp>
+        <p:nvSpPr>
+          <p:cNvPr id="3" name="TextBox 2"/>
+          <p:cNvSpPr txBox="1"/>
+          <p:nvPr/>
+        </p:nvSpPr>
+        <p:spPr>
+          <a:xfrm>
+            <a:off x="640080" y="0"/>
+            <a:ext cx="9082735" cy="1188720"/>
+          </a:xfrm>
+          <a:prstGeom prst="rect">
+            <a:avLst/>
+          </a:prstGeom>
+          <a:noFill/>
+        </p:spPr>
+        <p:txBody>
+          <a:bodyPr wrap="square" anchor="ctr" lIns="0" rIns="0" tIns="0" bIns="0">
+            <a:spAutoFit/>
+          </a:bodyPr>
+          <a:lstStyle/>
+          <a:p>
+            <a:pPr algn="ctr"/>
+            <a:r>
+              <a:rPr sz="2600" b="1" i="0">
+                <a:solidFill>
+                  <a:srgbClr val="FFFFFF"/>
+                </a:solidFill>
+                <a:latin typeface="Calibri"/>
+              </a:rPr>
+              <a:t>RUTA DE ENTREGABLES DEL CURSO</a:t>
+            </a:r>
+          </a:p>
+        </p:txBody>
+      </p:sp>
+      <p:sp>
+        <p:nvSpPr>
+          <p:cNvPr id="4" name="TextBox 3"/>
+          <p:cNvSpPr txBox="1"/>
+          <p:nvPr/>
+        </p:nvSpPr>
+        <p:spPr>
+          <a:xfrm>
+            <a:off x="640080" y="1280160"/>
+            <a:ext cx="10911535" cy="411480"/>
+          </a:xfrm>
+          <a:prstGeom prst="rect">
+            <a:avLst/>
+          </a:prstGeom>
+          <a:noFill/>
+        </p:spPr>
+        <p:txBody>
+          <a:bodyPr wrap="square" anchor="t" lIns="0" rIns="0" tIns="0" bIns="0">
+            <a:spAutoFit/>
+          </a:bodyPr>
+          <a:lstStyle/>
+          <a:p>
+            <a:pPr algn="ctr"/>
+            <a:r>
+              <a:rPr sz="1500" b="0" i="0">
+                <a:solidFill>
+                  <a:srgbClr val="2B2B2B"/>
+                </a:solidFill>
+                <a:latin typeface="Calibri"/>
+              </a:rPr>
+              <a:t>Sin fechas a propósito: aquí va </a:t>
+            </a:r>
+            <a:r>
+              <a:rPr sz="1500" b="1" i="0">
+                <a:solidFill>
+                  <a:srgbClr val="2B2B2B"/>
+                </a:solidFill>
+                <a:latin typeface="Calibri"/>
+              </a:rPr>
+              <a:t>en qué punto del curso</a:t>
+            </a:r>
+            <a:r>
+              <a:rPr sz="1500" b="0" i="0">
+                <a:solidFill>
+                  <a:srgbClr val="2B2B2B"/>
+                </a:solidFill>
+                <a:latin typeface="Calibri"/>
+              </a:rPr>
+              <a:t> cierra cada ítem · la ventana exacta la fija CDigital</a:t>
+            </a:r>
+          </a:p>
+        </p:txBody>
+      </p:sp>
+      <p:graphicFrame>
+        <p:nvGraphicFramePr>
+          <p:cNvPr id="5" name="Table 4"/>
+          <p:cNvGraphicFramePr>
+            <a:graphicFrameLocks noGrp="1"/>
+          </p:cNvGraphicFramePr>
+          <p:nvPr/>
+        </p:nvGraphicFramePr>
+        <p:xfrm>
+          <a:off x="640080" y="2011679"/>
+          <a:ext cx="10911533" cy="3017520"/>
+        </p:xfrm>
+        <a:graphic>
+          <a:graphicData uri="http://schemas.openxmlformats.org/drawingml/2006/table">
+            <a:tbl>
+              <a:tblPr>
+                <a:tableStyleId>{2D5ABB26-0587-4C30-8999-92F81FD0307C}</a:tableStyleId>
+              </a:tblPr>
+              <a:tblGrid>
+                <a:gridCol w="2659113"/>
+                <a:gridCol w="2659113"/>
+                <a:gridCol w="5593307"/>
+              </a:tblGrid>
+              <a:tr h="502920">
+                <a:tc>
+                  <a:txBody>
+                    <a:bodyPr/>
+                    <a:lstStyle/>
+                    <a:p>
+                      <a:pPr algn="l"/>
+                      <a:r>
+                        <a:rPr sz="1300" b="1" i="0">
+                          <a:solidFill>
+                            <a:srgbClr val="FFFFFF"/>
+                          </a:solidFill>
+                          <a:latin typeface="Calibri"/>
+                        </a:rPr>
+                        <a:t>Cierra en la semana de…</a:t>
+                      </a:r>
+                    </a:p>
+                  </a:txBody>
+                  <a:tcPr anchor="ctr" marL="109728" marR="91440" marT="36576" marB="36576">
+                    <a:solidFill>
+                      <a:srgbClr val="0C2340"/>
+                    </a:solidFill>
+                  </a:tcPr>
+                </a:tc>
+                <a:tc>
+                  <a:txBody>
+                    <a:bodyPr/>
+                    <a:lstStyle/>
+                    <a:p>
+                      <a:pPr algn="l"/>
+                      <a:r>
+                        <a:rPr sz="1300" b="1" i="0">
+                          <a:solidFill>
+                            <a:srgbClr val="FFFFFF"/>
+                          </a:solidFill>
+                          <a:latin typeface="Calibri"/>
+                        </a:rPr>
+                        <a:t>Entregable</a:t>
+                      </a:r>
+                    </a:p>
+                  </a:txBody>
+                  <a:tcPr anchor="ctr" marL="109728" marR="91440" marT="36576" marB="36576">
+                    <a:solidFill>
+                      <a:srgbClr val="0C2340"/>
+                    </a:solidFill>
+                  </a:tcPr>
+                </a:tc>
+                <a:tc>
+                  <a:txBody>
+                    <a:bodyPr/>
+                    <a:lstStyle/>
+                    <a:p>
+                      <a:pPr algn="l"/>
+                      <a:r>
+                        <a:rPr sz="1300" b="1" i="0">
+                          <a:solidFill>
+                            <a:srgbClr val="FFFFFF"/>
+                          </a:solidFill>
+                          <a:latin typeface="Calibri"/>
+                        </a:rPr>
+                        <a:t>Qué debes tener listo</a:t>
+                      </a:r>
+                    </a:p>
+                  </a:txBody>
+                  <a:tcPr anchor="ctr" marL="109728" marR="91440" marT="36576" marB="36576">
+                    <a:solidFill>
+                      <a:srgbClr val="0C2340"/>
+                    </a:solidFill>
+                  </a:tcPr>
+                </a:tc>
+              </a:tr>
+              <a:tr h="502920">
+                <a:tc>
+                  <a:txBody>
+                    <a:bodyPr/>
+                    <a:lstStyle/>
+                    <a:p>
+                      <a:pPr algn="l"/>
+                      <a:r>
+                        <a:rPr sz="1100" b="1" i="0">
+                          <a:solidFill>
+                            <a:srgbClr val="2B2B2B"/>
+                          </a:solidFill>
+                          <a:latin typeface="Calibri"/>
+                        </a:rPr>
+                        <a:t>Sesión 02</a:t>
+                      </a:r>
+                      <a:r>
+                        <a:rPr sz="1100" b="0" i="0">
+                          <a:solidFill>
+                            <a:srgbClr val="2B2B2B"/>
+                          </a:solidFill>
+                          <a:latin typeface="Calibri"/>
+                        </a:rPr>
+                        <a:t> · ya cerró</a:t>
+                      </a:r>
+                    </a:p>
+                  </a:txBody>
+                  <a:tcPr anchor="ctr" marL="109728" marR="91440" marT="36576" marB="36576">
+                    <a:solidFill>
+                      <a:srgbClr val="FFFFFF"/>
+                    </a:solidFill>
+                  </a:tcPr>
+                </a:tc>
+                <a:tc>
+                  <a:txBody>
+                    <a:bodyPr/>
+                    <a:lstStyle/>
+                    <a:p>
+                      <a:pPr algn="l"/>
+                      <a:r>
+                        <a:rPr sz="1100" b="1" i="0">
+                          <a:solidFill>
+                            <a:srgbClr val="2B2B2B"/>
+                          </a:solidFill>
+                          <a:latin typeface="Calibri"/>
+                        </a:rPr>
+                        <a:t>Quiz</a:t>
+                      </a:r>
+                      <a:r>
+                        <a:rPr sz="1100" b="0" i="0">
+                          <a:solidFill>
+                            <a:srgbClr val="2B2B2B"/>
+                          </a:solidFill>
+                          <a:latin typeface="Calibri"/>
+                        </a:rPr>
+                        <a:t> · Cuestionario · 25%</a:t>
+                      </a:r>
+                    </a:p>
+                  </a:txBody>
+                  <a:tcPr anchor="ctr" marL="109728" marR="91440" marT="36576" marB="36576">
+                    <a:solidFill>
+                      <a:srgbClr val="FFFFFF"/>
+                    </a:solidFill>
+                  </a:tcPr>
+                </a:tc>
+                <a:tc>
+                  <a:txBody>
+                    <a:bodyPr/>
+                    <a:lstStyle/>
+                    <a:p>
+                      <a:pPr algn="l"/>
+                      <a:r>
+                        <a:rPr sz="1100" b="0" i="0">
+                          <a:solidFill>
+                            <a:srgbClr val="2B2B2B"/>
+                          </a:solidFill>
+                          <a:latin typeface="Calibri"/>
+                        </a:rPr>
+                        <a:t>Estudia </a:t>
+                      </a:r>
+                      <a:r>
+                        <a:rPr sz="1100" b="1" i="0">
+                          <a:solidFill>
+                            <a:srgbClr val="2B2B2B"/>
+                          </a:solidFill>
+                          <a:latin typeface="Calibri"/>
+                        </a:rPr>
+                        <a:t>problema y pregunta</a:t>
+                      </a:r>
+                      <a:r>
+                        <a:rPr sz="1100" b="0" i="0">
+                          <a:solidFill>
+                            <a:srgbClr val="2B2B2B"/>
+                          </a:solidFill>
+                          <a:latin typeface="Calibri"/>
+                        </a:rPr>
+                        <a:t> de investigación; resuélvelo dentro de su ventana.</a:t>
+                      </a:r>
+                    </a:p>
+                  </a:txBody>
+                  <a:tcPr anchor="ctr" marL="109728" marR="91440" marT="36576" marB="36576">
+                    <a:solidFill>
+                      <a:srgbClr val="FFFFFF"/>
+                    </a:solidFill>
+                  </a:tcPr>
+                </a:tc>
+              </a:tr>
+              <a:tr h="502920">
+                <a:tc>
+                  <a:txBody>
+                    <a:bodyPr/>
+                    <a:lstStyle/>
+                    <a:p>
+                      <a:pPr algn="l"/>
+                      <a:r>
+                        <a:rPr sz="1100" b="1" i="0">
+                          <a:solidFill>
+                            <a:srgbClr val="2B2B2B"/>
+                          </a:solidFill>
+                          <a:latin typeface="Calibri"/>
+                        </a:rPr>
+                        <a:t>Sesión 07</a:t>
+                      </a:r>
+                      <a:r>
+                        <a:rPr sz="1100" b="0" i="0">
+                          <a:solidFill>
+                            <a:srgbClr val="2B2B2B"/>
+                          </a:solidFill>
+                          <a:latin typeface="Calibri"/>
+                        </a:rPr>
+                        <a:t> · pendiente</a:t>
+                      </a:r>
+                    </a:p>
+                  </a:txBody>
+                  <a:tcPr anchor="ctr" marL="109728" marR="91440" marT="36576" marB="36576">
+                    <a:solidFill>
+                      <a:srgbClr val="F2F2F2"/>
+                    </a:solidFill>
+                  </a:tcPr>
+                </a:tc>
+                <a:tc>
+                  <a:txBody>
+                    <a:bodyPr/>
+                    <a:lstStyle/>
+                    <a:p>
+                      <a:pPr algn="l"/>
+                      <a:r>
+                        <a:rPr sz="1100" b="1" i="0">
+                          <a:solidFill>
+                            <a:srgbClr val="2B2B2B"/>
+                          </a:solidFill>
+                          <a:latin typeface="Calibri"/>
+                        </a:rPr>
+                        <a:t>ACA 1</a:t>
+                      </a:r>
+                      <a:r>
+                        <a:rPr sz="1100" b="0" i="0">
+                          <a:solidFill>
+                            <a:srgbClr val="2B2B2B"/>
+                          </a:solidFill>
+                          <a:latin typeface="Calibri"/>
+                        </a:rPr>
+                        <a:t> · Tarea · 25%</a:t>
+                      </a:r>
+                    </a:p>
+                  </a:txBody>
+                  <a:tcPr anchor="ctr" marL="109728" marR="91440" marT="36576" marB="36576">
+                    <a:solidFill>
+                      <a:srgbClr val="F2F2F2"/>
+                    </a:solidFill>
+                  </a:tcPr>
+                </a:tc>
+                <a:tc>
+                  <a:txBody>
+                    <a:bodyPr/>
+                    <a:lstStyle/>
+                    <a:p>
+                      <a:pPr algn="l"/>
+                      <a:r>
+                        <a:rPr sz="1100" b="0" i="0">
+                          <a:solidFill>
+                            <a:srgbClr val="2B2B2B"/>
+                          </a:solidFill>
+                          <a:latin typeface="Calibri"/>
+                        </a:rPr>
+                        <a:t>Sube en </a:t>
+                      </a:r>
+                      <a:r>
+                        <a:rPr sz="1100" b="1" i="0">
+                          <a:solidFill>
+                            <a:srgbClr val="2B2B2B"/>
+                          </a:solidFill>
+                          <a:latin typeface="Calibri"/>
+                        </a:rPr>
+                        <a:t>plantilla APA</a:t>
+                      </a:r>
+                      <a:r>
+                        <a:rPr sz="1100" b="0" i="0">
+                          <a:solidFill>
+                            <a:srgbClr val="2B2B2B"/>
+                          </a:solidFill>
+                          <a:latin typeface="Calibri"/>
+                        </a:rPr>
+                        <a:t> problema, pregunta, objetivos, mínimo 6 antecedentes y los marcos.</a:t>
+                      </a:r>
+                    </a:p>
+                  </a:txBody>
+                  <a:tcPr anchor="ctr" marL="109728" marR="91440" marT="36576" marB="36576">
+                    <a:solidFill>
+                      <a:srgbClr val="F2F2F2"/>
+                    </a:solidFill>
+                  </a:tcPr>
+                </a:tc>
+              </a:tr>
+              <a:tr h="502920">
+                <a:tc>
+                  <a:txBody>
+                    <a:bodyPr/>
+                    <a:lstStyle/>
+                    <a:p>
+                      <a:pPr algn="l"/>
+                      <a:r>
+                        <a:rPr sz="1100" b="1" i="0">
+                          <a:solidFill>
+                            <a:srgbClr val="2B2B2B"/>
+                          </a:solidFill>
+                          <a:latin typeface="Calibri"/>
+                        </a:rPr>
+                        <a:t>Sesión 10</a:t>
+                      </a:r>
+                      <a:r>
+                        <a:rPr sz="1100" b="0" i="0">
+                          <a:solidFill>
+                            <a:srgbClr val="2B2B2B"/>
+                          </a:solidFill>
+                          <a:latin typeface="Calibri"/>
+                        </a:rPr>
+                        <a:t> · pendiente</a:t>
+                      </a:r>
+                    </a:p>
+                  </a:txBody>
+                  <a:tcPr anchor="ctr" marL="109728" marR="91440" marT="36576" marB="36576">
+                    <a:solidFill>
+                      <a:srgbClr val="FFFFFF"/>
+                    </a:solidFill>
+                  </a:tcPr>
+                </a:tc>
+                <a:tc>
+                  <a:txBody>
+                    <a:bodyPr/>
+                    <a:lstStyle/>
+                    <a:p>
+                      <a:pPr algn="l"/>
+                      <a:r>
+                        <a:rPr sz="1100" b="1" i="0">
+                          <a:solidFill>
+                            <a:srgbClr val="2B2B2B"/>
+                          </a:solidFill>
+                          <a:latin typeface="Calibri"/>
+                        </a:rPr>
+                        <a:t>ACA FINAL</a:t>
+                      </a:r>
+                      <a:r>
+                        <a:rPr sz="1100" b="0" i="0">
+                          <a:solidFill>
+                            <a:srgbClr val="2B2B2B"/>
+                          </a:solidFill>
+                          <a:latin typeface="Calibri"/>
+                        </a:rPr>
+                        <a:t> · Tarea · 42%</a:t>
+                      </a:r>
+                    </a:p>
+                  </a:txBody>
+                  <a:tcPr anchor="ctr" marL="109728" marR="91440" marT="36576" marB="36576">
+                    <a:solidFill>
+                      <a:srgbClr val="FFFFFF"/>
+                    </a:solidFill>
+                  </a:tcPr>
+                </a:tc>
+                <a:tc>
+                  <a:txBody>
+                    <a:bodyPr/>
+                    <a:lstStyle/>
+                    <a:p>
+                      <a:pPr algn="l"/>
+                      <a:r>
+                        <a:rPr sz="1100" b="0" i="0">
+                          <a:solidFill>
+                            <a:srgbClr val="2B2B2B"/>
+                          </a:solidFill>
+                          <a:latin typeface="Calibri"/>
+                        </a:rPr>
+                        <a:t>Sube el anteproyecto integrado con las </a:t>
+                      </a:r>
+                      <a:r>
+                        <a:rPr sz="1100" b="1" i="0">
+                          <a:solidFill>
+                            <a:srgbClr val="2B2B2B"/>
+                          </a:solidFill>
+                          <a:latin typeface="Calibri"/>
+                        </a:rPr>
+                        <a:t>correcciones</a:t>
+                      </a:r>
+                      <a:r>
+                        <a:rPr sz="1100" b="0" i="0">
+                          <a:solidFill>
+                            <a:srgbClr val="2B2B2B"/>
+                          </a:solidFill>
+                          <a:latin typeface="Calibri"/>
+                        </a:rPr>
+                        <a:t> de la ACA 1, metodología y viabilidad.</a:t>
+                      </a:r>
+                    </a:p>
+                  </a:txBody>
+                  <a:tcPr anchor="ctr" marL="109728" marR="91440" marT="36576" marB="36576">
+                    <a:solidFill>
+                      <a:srgbClr val="FFFFFF"/>
+                    </a:solidFill>
+                  </a:tcPr>
+                </a:tc>
+              </a:tr>
+              <a:tr h="502920">
+                <a:tc>
+                  <a:txBody>
+                    <a:bodyPr/>
+                    <a:lstStyle/>
+                    <a:p>
+                      <a:pPr algn="l"/>
+                      <a:r>
+                        <a:rPr sz="1100" b="1" i="0">
+                          <a:solidFill>
+                            <a:srgbClr val="2B2B2B"/>
+                          </a:solidFill>
+                          <a:latin typeface="Calibri"/>
+                        </a:rPr>
+                        <a:t>Sesión 11</a:t>
+                      </a:r>
+                      <a:r>
+                        <a:rPr sz="1100" b="0" i="0">
+                          <a:solidFill>
+                            <a:srgbClr val="2B2B2B"/>
+                          </a:solidFill>
+                          <a:latin typeface="Calibri"/>
+                        </a:rPr>
+                        <a:t> · pendiente</a:t>
+                      </a:r>
+                    </a:p>
+                  </a:txBody>
+                  <a:tcPr anchor="ctr" marL="109728" marR="91440" marT="36576" marB="36576">
+                    <a:solidFill>
+                      <a:srgbClr val="F2F2F2"/>
+                    </a:solidFill>
+                  </a:tcPr>
+                </a:tc>
+                <a:tc>
+                  <a:txBody>
+                    <a:bodyPr/>
+                    <a:lstStyle/>
+                    <a:p>
+                      <a:pPr algn="l"/>
+                      <a:r>
+                        <a:rPr sz="1100" b="1" i="0">
+                          <a:solidFill>
+                            <a:srgbClr val="2B2B2B"/>
+                          </a:solidFill>
+                          <a:latin typeface="Calibri"/>
+                        </a:rPr>
+                        <a:t>Autoevaluación</a:t>
+                      </a:r>
+                      <a:r>
+                        <a:rPr sz="1100" b="0" i="0">
+                          <a:solidFill>
+                            <a:srgbClr val="2B2B2B"/>
+                          </a:solidFill>
+                          <a:latin typeface="Calibri"/>
+                        </a:rPr>
+                        <a:t> · Cuestionario · 4%</a:t>
+                      </a:r>
+                    </a:p>
+                  </a:txBody>
+                  <a:tcPr anchor="ctr" marL="109728" marR="91440" marT="36576" marB="36576">
+                    <a:solidFill>
+                      <a:srgbClr val="F2F2F2"/>
+                    </a:solidFill>
+                  </a:tcPr>
+                </a:tc>
+                <a:tc>
+                  <a:txBody>
+                    <a:bodyPr/>
+                    <a:lstStyle/>
+                    <a:p>
+                      <a:pPr algn="l"/>
+                      <a:r>
+                        <a:rPr sz="1100" b="0" i="0">
+                          <a:solidFill>
+                            <a:srgbClr val="2B2B2B"/>
+                          </a:solidFill>
+                          <a:latin typeface="Calibri"/>
+                        </a:rPr>
+                        <a:t>Diligénciala tú, dentro de su ventana, según tu </a:t>
+                      </a:r>
+                      <a:r>
+                        <a:rPr sz="1100" b="1" i="0">
+                          <a:solidFill>
+                            <a:srgbClr val="2B2B2B"/>
+                          </a:solidFill>
+                          <a:latin typeface="Calibri"/>
+                        </a:rPr>
+                        <a:t>participación real</a:t>
+                      </a:r>
+                      <a:r>
+                        <a:rPr sz="1100" b="0" i="0">
+                          <a:solidFill>
+                            <a:srgbClr val="2B2B2B"/>
+                          </a:solidFill>
+                          <a:latin typeface="Calibri"/>
+                        </a:rPr>
+                        <a:t>.</a:t>
+                      </a:r>
+                    </a:p>
+                  </a:txBody>
+                  <a:tcPr anchor="ctr" marL="109728" marR="91440" marT="36576" marB="36576">
+                    <a:solidFill>
+                      <a:srgbClr val="F2F2F2"/>
+                    </a:solidFill>
+                  </a:tcPr>
+                </a:tc>
+              </a:tr>
+              <a:tr h="502920">
+                <a:tc>
+                  <a:txBody>
+                    <a:bodyPr/>
+                    <a:lstStyle/>
+                    <a:p>
+                      <a:pPr algn="l"/>
+                      <a:r>
+                        <a:rPr sz="1100" b="1" i="0">
+                          <a:solidFill>
+                            <a:srgbClr val="2B2B2B"/>
+                          </a:solidFill>
+                          <a:latin typeface="Calibri"/>
+                        </a:rPr>
+                        <a:t>Sesión 11</a:t>
+                      </a:r>
+                      <a:r>
+                        <a:rPr sz="1100" b="0" i="0">
+                          <a:solidFill>
+                            <a:srgbClr val="2B2B2B"/>
+                          </a:solidFill>
+                          <a:latin typeface="Calibri"/>
+                        </a:rPr>
+                        <a:t> · pendiente</a:t>
+                      </a:r>
+                    </a:p>
+                  </a:txBody>
+                  <a:tcPr anchor="ctr" marL="109728" marR="91440" marT="36576" marB="36576">
+                    <a:solidFill>
+                      <a:srgbClr val="FFFFFF"/>
+                    </a:solidFill>
+                  </a:tcPr>
+                </a:tc>
+                <a:tc>
+                  <a:txBody>
+                    <a:bodyPr/>
+                    <a:lstStyle/>
+                    <a:p>
+                      <a:pPr algn="l"/>
+                      <a:r>
+                        <a:rPr sz="1100" b="1" i="0">
+                          <a:solidFill>
+                            <a:srgbClr val="2B2B2B"/>
+                          </a:solidFill>
+                          <a:latin typeface="Calibri"/>
+                        </a:rPr>
+                        <a:t>Coevaluación</a:t>
+                      </a:r>
+                      <a:r>
+                        <a:rPr sz="1100" b="0" i="0">
+                          <a:solidFill>
+                            <a:srgbClr val="2B2B2B"/>
+                          </a:solidFill>
+                          <a:latin typeface="Calibri"/>
+                        </a:rPr>
+                        <a:t> · Foro · 4%</a:t>
+                      </a:r>
+                    </a:p>
+                  </a:txBody>
+                  <a:tcPr anchor="ctr" marL="109728" marR="91440" marT="36576" marB="36576">
+                    <a:solidFill>
+                      <a:srgbClr val="FFFFFF"/>
+                    </a:solidFill>
+                  </a:tcPr>
+                </a:tc>
+                <a:tc>
+                  <a:txBody>
+                    <a:bodyPr/>
+                    <a:lstStyle/>
+                    <a:p>
+                      <a:pPr algn="l"/>
+                      <a:r>
+                        <a:rPr sz="1100" b="1" i="0">
+                          <a:solidFill>
+                            <a:srgbClr val="2B2B2B"/>
+                          </a:solidFill>
+                          <a:latin typeface="Calibri"/>
+                        </a:rPr>
+                        <a:t>Publica</a:t>
+                      </a:r>
+                      <a:r>
+                        <a:rPr sz="1100" b="0" i="0">
+                          <a:solidFill>
+                            <a:srgbClr val="2B2B2B"/>
+                          </a:solidFill>
+                          <a:latin typeface="Calibri"/>
+                        </a:rPr>
+                        <a:t> tu propio aporte y valora hechos del trabajo del equipo, con respeto.</a:t>
+                      </a:r>
+                    </a:p>
+                  </a:txBody>
+                  <a:tcPr anchor="ctr" marL="109728" marR="91440" marT="36576" marB="36576">
+                    <a:solidFill>
+                      <a:srgbClr val="FFFFFF"/>
+                    </a:solidFill>
+                  </a:tcPr>
+                </a:tc>
+              </a:tr>
+            </a:tbl>
+          </a:graphicData>
+        </a:graphic>
+      </p:graphicFrame>
+      <p:sp>
+        <p:nvSpPr>
+          <p:cNvPr id="6" name="TextBox 5"/>
+          <p:cNvSpPr txBox="1"/>
+          <p:nvPr/>
+        </p:nvSpPr>
+        <p:spPr>
+          <a:xfrm>
+            <a:off x="640080" y="5166360"/>
+            <a:ext cx="10911535" cy="548640"/>
+          </a:xfrm>
+          <a:prstGeom prst="rect">
+            <a:avLst/>
+          </a:prstGeom>
+          <a:noFill/>
+        </p:spPr>
+        <p:txBody>
+          <a:bodyPr wrap="square" anchor="t" lIns="0" rIns="0" tIns="0" bIns="0">
+            <a:spAutoFit/>
+          </a:bodyPr>
+          <a:lstStyle/>
+          <a:p>
+            <a:r>
+              <a:rPr sz="1200" b="0" i="1">
+                <a:solidFill>
+                  <a:srgbClr val="2B2B2B"/>
+                </a:solidFill>
+                <a:latin typeface="Calibri"/>
+              </a:rPr>
+              <a:t>Esta misma tabla va al final de todas las sesiones. La </a:t>
+            </a:r>
+            <a:r>
+              <a:rPr sz="1200" b="1" i="1">
+                <a:solidFill>
+                  <a:srgbClr val="2B2B2B"/>
+                </a:solidFill>
+                <a:latin typeface="Calibri"/>
+              </a:rPr>
+              <a:t>fecha</a:t>
+            </a:r>
+            <a:r>
+              <a:rPr sz="1200" b="0" i="1">
+                <a:solidFill>
+                  <a:srgbClr val="2B2B2B"/>
+                </a:solidFill>
+                <a:latin typeface="Calibri"/>
+              </a:rPr>
+              <a:t> de cada ventana está en el enunciado del ítem (`Clases/Recursos/ACAs/`) y en el aula: si el aula y cualquier otro material se contradicen, </a:t>
+            </a:r>
+            <a:r>
+              <a:rPr sz="1200" b="1" i="1">
+                <a:solidFill>
+                  <a:srgbClr val="2B2B2B"/>
+                </a:solidFill>
+                <a:latin typeface="Calibri"/>
+              </a:rPr>
+              <a:t>manda el aula</a:t>
+            </a:r>
+            <a:r>
+              <a:rPr sz="1200" b="0" i="1">
+                <a:solidFill>
+                  <a:srgbClr val="2B2B2B"/>
+                </a:solidFill>
+                <a:latin typeface="Calibri"/>
+              </a:rPr>
+              <a:t>.</a:t>
+            </a:r>
+          </a:p>
+        </p:txBody>
+      </p:sp>
+      <p:sp>
+        <p:nvSpPr>
+          <p:cNvPr id="7" name="TextBox 6"/>
+          <p:cNvSpPr txBox="1"/>
+          <p:nvPr/>
+        </p:nvSpPr>
+        <p:spPr>
+          <a:xfrm>
+            <a:off x="11094415" y="6446520"/>
+            <a:ext cx="548640" cy="274320"/>
+          </a:xfrm>
+          <a:prstGeom prst="rect">
+            <a:avLst/>
+          </a:prstGeom>
+          <a:noFill/>
+        </p:spPr>
+        <p:txBody>
+          <a:bodyPr wrap="square" anchor="t" lIns="0" rIns="0" tIns="0" bIns="0">
+            <a:spAutoFit/>
+          </a:bodyPr>
+          <a:lstStyle/>
+          <a:p>
+            <a:pPr algn="r"/>
+            <a:r>
+              <a:rPr sz="1000" b="1" i="0">
+                <a:solidFill>
+                  <a:srgbClr val="8F989D"/>
+                </a:solidFill>
+                <a:latin typeface="Calibri"/>
+              </a:rPr>
+              <a:t>19</a:t>
+            </a:r>
+          </a:p>
+        </p:txBody>
+      </p:sp>
+    </p:spTree>
+  </p:cSld>
+  <p:clrMapOvr>
+    <a:masterClrMapping/>
+  </p:clrMapOvr>
+</p:sld>
+</file>
+
+<file path=ppt/slides/slide2.xml><?xml version="1.0" encoding="utf-8"?>
+<p:sld xmlns:a="http://schemas.openxmlformats.org/drawingml/2006/main" xmlns:p="http://schemas.openxmlformats.org/presentationml/2006/main" xmlns:r="http://schemas.openxmlformats.org/officeDocument/2006/relationships">
+  <p:cSld>
+    <p:bg>
+      <p:bgPr>
+        <a:solidFill>
+          <a:srgbClr val="FFFFFF"/>
+        </a:solidFill>
+        <a:effectLst/>
+      </p:bgPr>
+    </p:bg>
+    <p:spTree>
+      <p:nvGrpSpPr>
+        <p:cNvPr id="1" name=""/>
+        <p:cNvGrpSpPr/>
+        <p:nvPr/>
+      </p:nvGrpSpPr>
+      <p:grpSpPr/>
+      <p:sp>
+        <p:nvSpPr>
+          <p:cNvPr id="2" name="Rectangle 1"/>
+          <p:cNvSpPr/>
+          <p:nvPr/>
+        </p:nvSpPr>
+        <p:spPr>
+          <a:xfrm>
+            <a:off x="0" y="0"/>
+            <a:ext cx="12191695" cy="1188720"/>
+          </a:xfrm>
+          <a:prstGeom prst="rect">
+            <a:avLst/>
+          </a:prstGeom>
+          <a:solidFill>
+            <a:srgbClr val="0C2340"/>
+          </a:solidFill>
+          <a:ln>
+            <a:noFill/>
+          </a:ln>
+          <a:effectLst/>
+        </p:spPr>
+        <p:style>
+          <a:lnRef idx="1">
+            <a:schemeClr val="accent1"/>
+          </a:lnRef>
+          <a:fillRef idx="3">
+            <a:schemeClr val="accent1"/>
+          </a:fillRef>
+          <a:effectRef idx="2">
+            <a:schemeClr val="accent1"/>
+          </a:effectRef>
+          <a:fontRef idx="minor">
+            <a:schemeClr val="lt1"/>
+          </a:fontRef>
+        </p:style>
+        <p:txBody>
+          <a:bodyPr rtlCol="0" anchor="ctr"/>
+          <a:lstStyle/>
+          <a:p>
+            <a:pPr algn="ctr"/>
+          </a:p>
+        </p:txBody>
+      </p:sp>
+      <p:sp>
+        <p:nvSpPr>
+          <p:cNvPr id="3" name="TextBox 2"/>
+          <p:cNvSpPr txBox="1"/>
+          <p:nvPr/>
+        </p:nvSpPr>
+        <p:spPr>
+          <a:xfrm>
+            <a:off x="640080" y="0"/>
+            <a:ext cx="9082735" cy="1188720"/>
+          </a:xfrm>
+          <a:prstGeom prst="rect">
+            <a:avLst/>
+          </a:prstGeom>
+          <a:noFill/>
+        </p:spPr>
+        <p:txBody>
+          <a:bodyPr wrap="square" anchor="ctr" lIns="0" rIns="0" tIns="0" bIns="0">
+            <a:spAutoFit/>
+          </a:bodyPr>
+          <a:lstStyle/>
+          <a:p>
+            <a:pPr algn="ctr"/>
+            <a:r>
+              <a:rPr sz="2600" b="1" i="0">
+                <a:solidFill>
+                  <a:srgbClr val="FFFFFF"/>
+                </a:solidFill>
+                <a:latin typeface="Calibri"/>
+              </a:rPr>
+              <a:t>Una palabra, cinco lectores, cinco significados distintos</a:t>
+            </a:r>
+          </a:p>
+        </p:txBody>
+      </p:sp>
+      <p:sp>
+        <p:nvSpPr>
+          <p:cNvPr id="4" name="TextBox 3"/>
+          <p:cNvSpPr txBox="1"/>
+          <p:nvPr/>
+        </p:nvSpPr>
+        <p:spPr>
+          <a:xfrm>
+            <a:off x="640080" y="1691639"/>
+            <a:ext cx="10911535" cy="4617720"/>
+          </a:xfrm>
+          <a:prstGeom prst="rect">
+            <a:avLst/>
+          </a:prstGeom>
+          <a:noFill/>
+        </p:spPr>
+        <p:txBody>
+          <a:bodyPr wrap="square" anchor="t" lIns="0" rIns="0" tIns="0" bIns="0">
+            <a:spAutoFit/>
+          </a:bodyPr>
+          <a:lstStyle/>
+          <a:p>
+            <a:pPr>
+              <a:spcAft>
+                <a:spcPts val="1000"/>
+              </a:spcAft>
+            </a:pPr>
+            <a:r>
+              <a:rPr sz="1600" b="0" i="0">
+                <a:solidFill>
+                  <a:srgbClr val="2B2B2B"/>
+                </a:solidFill>
+                <a:latin typeface="Calibri"/>
+              </a:rPr>
+              <a:t>–   Escriba “adopción” en su anteproyecto y cinco lectores van a entender cinco cosas distintas.</a:t>
+            </a:r>
+          </a:p>
+          <a:p>
+            <a:pPr lvl="1">
+              <a:spcAft>
+                <a:spcPts val="600"/>
+              </a:spcAft>
+            </a:pPr>
+            <a:r>
+              <a:rPr sz="1500" b="0" i="0">
+                <a:solidFill>
+                  <a:srgbClr val="2B2B2B"/>
+                </a:solidFill>
+                <a:latin typeface="Calibri"/>
+              </a:rPr>
+              <a:t>●   ¿Adopción es que instalen la herramienta? ¿Que la usen una vez? ¿Que la usen a diario durante un mes?</a:t>
+            </a:r>
+          </a:p>
+          <a:p>
+            <a:pPr>
+              <a:spcAft>
+                <a:spcPts val="1000"/>
+              </a:spcAft>
+            </a:pPr>
+            <a:r>
+              <a:rPr sz="1600" b="0" i="0">
+                <a:solidFill>
+                  <a:srgbClr val="2B2B2B"/>
+                </a:solidFill>
+                <a:latin typeface="Calibri"/>
+              </a:rPr>
+              <a:t>–   Mientras la palabra siga ambigua, el método no puede observar nada: no sabe qué buscar.</a:t>
+            </a:r>
+          </a:p>
+          <a:p>
+            <a:pPr>
+              <a:spcAft>
+                <a:spcPts val="1000"/>
+              </a:spcAft>
+            </a:pPr>
+            <a:r>
+              <a:rPr sz="1600" b="0" i="0">
+                <a:solidFill>
+                  <a:srgbClr val="2B2B2B"/>
+                </a:solidFill>
+                <a:latin typeface="Calibri"/>
+              </a:rPr>
+              <a:t>–   Caso de aula: un equipo prometió “evaluar la usabilidad” de un asistente.</a:t>
+            </a:r>
+          </a:p>
+          <a:p>
+            <a:pPr lvl="1">
+              <a:spcAft>
+                <a:spcPts val="600"/>
+              </a:spcAft>
+            </a:pPr>
+            <a:r>
+              <a:rPr sz="1500" b="0" i="0">
+                <a:solidFill>
+                  <a:srgbClr val="2B2B2B"/>
+                </a:solidFill>
+                <a:latin typeface="Calibri"/>
+              </a:rPr>
+              <a:t>●   Al preguntarles qué era usabilidad para ellos, dieron tres respuestas distintas dentro del mismo equipo.</a:t>
+            </a:r>
+          </a:p>
+          <a:p>
+            <a:pPr>
+              <a:spcAft>
+                <a:spcPts val="1000"/>
+              </a:spcAft>
+            </a:pPr>
+            <a:r>
+              <a:rPr sz="1600" b="0" i="0">
+                <a:solidFill>
+                  <a:srgbClr val="2B2B2B"/>
+                </a:solidFill>
+                <a:latin typeface="Calibri"/>
+              </a:rPr>
+              <a:t>–   Hoy cerramos esa puerta con dos piezas: el </a:t>
+            </a:r>
+            <a:r>
+              <a:rPr sz="1600" b="1" i="0">
+                <a:solidFill>
+                  <a:srgbClr val="2B2B2B"/>
+                </a:solidFill>
+                <a:latin typeface="Calibri"/>
+              </a:rPr>
+              <a:t>marco conceptual</a:t>
+            </a:r>
+            <a:r>
+              <a:rPr sz="1600" b="0" i="0">
+                <a:solidFill>
+                  <a:srgbClr val="2B2B2B"/>
+                </a:solidFill>
+                <a:latin typeface="Calibri"/>
+              </a:rPr>
+              <a:t> (qué significan sus términos) y el </a:t>
+            </a:r>
+            <a:r>
+              <a:rPr sz="1600" b="1" i="0">
+                <a:solidFill>
+                  <a:srgbClr val="2B2B2B"/>
+                </a:solidFill>
+                <a:latin typeface="Calibri"/>
+              </a:rPr>
+              <a:t>marco contextual</a:t>
+            </a:r>
+            <a:r>
+              <a:rPr sz="1600" b="0" i="0">
+                <a:solidFill>
+                  <a:srgbClr val="2B2B2B"/>
+                </a:solidFill>
+                <a:latin typeface="Calibri"/>
+              </a:rPr>
+              <a:t> (dónde ocurre todo).</a:t>
+            </a:r>
+          </a:p>
+          <a:p>
+            <a:pPr>
+              <a:spcAft>
+                <a:spcPts val="1000"/>
+              </a:spcAft>
+            </a:pPr>
+            <a:r>
+              <a:rPr sz="1600" b="0" i="0">
+                <a:solidFill>
+                  <a:srgbClr val="2B2B2B"/>
+                </a:solidFill>
+                <a:latin typeface="Calibri"/>
+              </a:rPr>
+              <a:t>–   Con esto queda prácticamente completo el marco referencial del anteproyecto.</a:t>
+            </a:r>
+          </a:p>
+        </p:txBody>
+      </p:sp>
+      <p:sp>
+        <p:nvSpPr>
+          <p:cNvPr id="5" name="TextBox 4"/>
+          <p:cNvSpPr txBox="1"/>
+          <p:nvPr/>
+        </p:nvSpPr>
+        <p:spPr>
+          <a:xfrm>
+            <a:off x="11094415" y="6446520"/>
+            <a:ext cx="548640" cy="274320"/>
+          </a:xfrm>
+          <a:prstGeom prst="rect">
+            <a:avLst/>
+          </a:prstGeom>
+          <a:noFill/>
+        </p:spPr>
+        <p:txBody>
+          <a:bodyPr wrap="square" anchor="t" lIns="0" rIns="0" tIns="0" bIns="0">
+            <a:spAutoFit/>
+          </a:bodyPr>
+          <a:lstStyle/>
+          <a:p>
+            <a:pPr algn="r"/>
+            <a:r>
+              <a:rPr sz="1000" b="1" i="0">
+                <a:solidFill>
+                  <a:srgbClr val="8F989D"/>
+                </a:solidFill>
+                <a:latin typeface="Calibri"/>
+              </a:rPr>
+              <a:t>2</a:t>
+            </a:r>
+          </a:p>
+        </p:txBody>
+      </p:sp>
+      <p:sp>
+        <p:nvSpPr>
+          <p:cNvPr id="6" name="TextBox 5"/>
+          <p:cNvSpPr txBox="1"/>
+          <p:nvPr/>
+        </p:nvSpPr>
+        <p:spPr>
+          <a:xfrm>
+            <a:off x="640080" y="5943600"/>
+            <a:ext cx="9997135" cy="457200"/>
+          </a:xfrm>
+          <a:prstGeom prst="rect">
+            <a:avLst/>
+          </a:prstGeom>
+          <a:noFill/>
+        </p:spPr>
+        <p:txBody>
+          <a:bodyPr wrap="square" anchor="t" lIns="0" rIns="0" tIns="0" bIns="0">
+            <a:spAutoFit/>
+          </a:bodyPr>
+          <a:lstStyle/>
+          <a:p>
+            <a:r>
+              <a:rPr sz="1200" b="0" i="1">
+                <a:solidFill>
+                  <a:srgbClr val="2B2B2B"/>
+                </a:solidFill>
+                <a:latin typeface="Calibri"/>
+              </a:rPr>
+              <a:t>Regla del día: si dos lectores pueden entender cosas distintas por la misma palabra, esa palabra necesita definición operativa.</a:t>
+            </a:r>
+          </a:p>
+        </p:txBody>
+      </p:sp>
+    </p:spTree>
+  </p:cSld>
+  <p:clrMapOvr>
+    <a:masterClrMapping/>
+  </p:clrMapOvr>
+</p:sld>
+</file>
+
+<file path=ppt/slides/slide20.xml><?xml version="1.0" encoding="utf-8"?>
 <p:sld xmlns:a="http://schemas.openxmlformats.org/drawingml/2006/main" xmlns:p="http://schemas.openxmlformats.org/presentationml/2006/main" xmlns:r="http://schemas.openxmlformats.org/officeDocument/2006/relationships">
   <p:cSld>
     <p:bg>
@@ -7405,351 +9145,6 @@
                 <a:latin typeface="Calibri"/>
               </a:rPr>
               <a:t>PROYECTO I</a:t>
-            </a:r>
-          </a:p>
-        </p:txBody>
-      </p:sp>
-    </p:spTree>
-  </p:cSld>
-  <p:clrMapOvr>
-    <a:masterClrMapping/>
-  </p:clrMapOvr>
-</p:sld>
-</file>
-
-<file path=ppt/slides/slide2.xml><?xml version="1.0" encoding="utf-8"?>
-<p:sld xmlns:a="http://schemas.openxmlformats.org/drawingml/2006/main" xmlns:p="http://schemas.openxmlformats.org/presentationml/2006/main" xmlns:r="http://schemas.openxmlformats.org/officeDocument/2006/relationships">
-  <p:cSld>
-    <p:bg>
-      <p:bgPr>
-        <a:solidFill>
-          <a:srgbClr val="FFFFFF"/>
-        </a:solidFill>
-        <a:effectLst/>
-      </p:bgPr>
-    </p:bg>
-    <p:spTree>
-      <p:nvGrpSpPr>
-        <p:cNvPr id="1" name=""/>
-        <p:cNvGrpSpPr/>
-        <p:nvPr/>
-      </p:nvGrpSpPr>
-      <p:grpSpPr/>
-      <p:sp>
-        <p:nvSpPr>
-          <p:cNvPr id="2" name="Rectangle 1"/>
-          <p:cNvSpPr/>
-          <p:nvPr/>
-        </p:nvSpPr>
-        <p:spPr>
-          <a:xfrm>
-            <a:off x="0" y="0"/>
-            <a:ext cx="12191695" cy="1188720"/>
-          </a:xfrm>
-          <a:prstGeom prst="rect">
-            <a:avLst/>
-          </a:prstGeom>
-          <a:solidFill>
-            <a:srgbClr val="0C2340"/>
-          </a:solidFill>
-          <a:ln>
-            <a:noFill/>
-          </a:ln>
-          <a:effectLst/>
-        </p:spPr>
-        <p:style>
-          <a:lnRef idx="1">
-            <a:schemeClr val="accent1"/>
-          </a:lnRef>
-          <a:fillRef idx="3">
-            <a:schemeClr val="accent1"/>
-          </a:fillRef>
-          <a:effectRef idx="2">
-            <a:schemeClr val="accent1"/>
-          </a:effectRef>
-          <a:fontRef idx="minor">
-            <a:schemeClr val="lt1"/>
-          </a:fontRef>
-        </p:style>
-        <p:txBody>
-          <a:bodyPr rtlCol="0" anchor="ctr"/>
-          <a:lstStyle/>
-          <a:p>
-            <a:pPr algn="ctr"/>
-          </a:p>
-        </p:txBody>
-      </p:sp>
-      <p:sp>
-        <p:nvSpPr>
-          <p:cNvPr id="3" name="TextBox 2"/>
-          <p:cNvSpPr txBox="1"/>
-          <p:nvPr/>
-        </p:nvSpPr>
-        <p:spPr>
-          <a:xfrm>
-            <a:off x="640080" y="0"/>
-            <a:ext cx="9082735" cy="1188720"/>
-          </a:xfrm>
-          <a:prstGeom prst="rect">
-            <a:avLst/>
-          </a:prstGeom>
-          <a:noFill/>
-        </p:spPr>
-        <p:txBody>
-          <a:bodyPr wrap="square" anchor="ctr" lIns="0" rIns="0" tIns="0" bIns="0">
-            <a:spAutoFit/>
-          </a:bodyPr>
-          <a:lstStyle/>
-          <a:p>
-            <a:pPr algn="ctr"/>
-            <a:r>
-              <a:rPr sz="2600" b="1" i="0">
-                <a:solidFill>
-                  <a:srgbClr val="FFFFFF"/>
-                </a:solidFill>
-                <a:latin typeface="Calibri"/>
-              </a:rPr>
-              <a:t>Una palabra, cinco lectores, cinco significados distintos</a:t>
-            </a:r>
-          </a:p>
-        </p:txBody>
-      </p:sp>
-      <p:sp>
-        <p:nvSpPr>
-          <p:cNvPr id="4" name="TextBox 3"/>
-          <p:cNvSpPr txBox="1"/>
-          <p:nvPr/>
-        </p:nvSpPr>
-        <p:spPr>
-          <a:xfrm>
-            <a:off x="640080" y="1691639"/>
-            <a:ext cx="10911535" cy="4617720"/>
-          </a:xfrm>
-          <a:prstGeom prst="rect">
-            <a:avLst/>
-          </a:prstGeom>
-          <a:noFill/>
-        </p:spPr>
-        <p:txBody>
-          <a:bodyPr wrap="square" anchor="t" lIns="0" rIns="0" tIns="0" bIns="0">
-            <a:spAutoFit/>
-          </a:bodyPr>
-          <a:lstStyle/>
-          <a:p>
-            <a:pPr>
-              <a:spcAft>
-                <a:spcPts val="1000"/>
-              </a:spcAft>
-            </a:pPr>
-            <a:r>
-              <a:rPr sz="1600" b="0" i="0">
-                <a:solidFill>
-                  <a:srgbClr val="2B2B2B"/>
-                </a:solidFill>
-                <a:latin typeface="Calibri"/>
-              </a:rPr>
-              <a:t>–   Escriba “adopción” en su anteproyecto y cinco lectores van a entender cinco cosas distintas.</a:t>
-            </a:r>
-          </a:p>
-          <a:p>
-            <a:pPr lvl="1">
-              <a:spcAft>
-                <a:spcPts val="600"/>
-              </a:spcAft>
-            </a:pPr>
-            <a:r>
-              <a:rPr sz="1500" b="0" i="0">
-                <a:solidFill>
-                  <a:srgbClr val="2B2B2B"/>
-                </a:solidFill>
-                <a:latin typeface="Calibri"/>
-              </a:rPr>
-              <a:t>●   ¿Adopción es que instalen la herramienta? ¿Que la usen una vez? ¿Que la usen a diario durante un mes?</a:t>
-            </a:r>
-          </a:p>
-          <a:p>
-            <a:pPr>
-              <a:spcAft>
-                <a:spcPts val="1000"/>
-              </a:spcAft>
-            </a:pPr>
-            <a:r>
-              <a:rPr sz="1600" b="0" i="0">
-                <a:solidFill>
-                  <a:srgbClr val="2B2B2B"/>
-                </a:solidFill>
-                <a:latin typeface="Calibri"/>
-              </a:rPr>
-              <a:t>–   Mientras la palabra siga ambigua, el método no puede observar nada: no sabe qué buscar.</a:t>
-            </a:r>
-          </a:p>
-          <a:p>
-            <a:pPr>
-              <a:spcAft>
-                <a:spcPts val="1000"/>
-              </a:spcAft>
-            </a:pPr>
-            <a:r>
-              <a:rPr sz="1600" b="0" i="0">
-                <a:solidFill>
-                  <a:srgbClr val="2B2B2B"/>
-                </a:solidFill>
-                <a:latin typeface="Calibri"/>
-              </a:rPr>
-              <a:t>–   Caso de aula: un equipo prometió “evaluar la usabilidad” de un asistente.</a:t>
-            </a:r>
-          </a:p>
-          <a:p>
-            <a:pPr lvl="1">
-              <a:spcAft>
-                <a:spcPts val="600"/>
-              </a:spcAft>
-            </a:pPr>
-            <a:r>
-              <a:rPr sz="1500" b="0" i="0">
-                <a:solidFill>
-                  <a:srgbClr val="2B2B2B"/>
-                </a:solidFill>
-                <a:latin typeface="Calibri"/>
-              </a:rPr>
-              <a:t>●   Al preguntarles qué era usabilidad para ellos, dieron tres respuestas distintas dentro del mismo equipo.</a:t>
-            </a:r>
-          </a:p>
-          <a:p>
-            <a:pPr>
-              <a:spcAft>
-                <a:spcPts val="1000"/>
-              </a:spcAft>
-            </a:pPr>
-            <a:r>
-              <a:rPr sz="1600" b="0" i="0">
-                <a:solidFill>
-                  <a:srgbClr val="2B2B2B"/>
-                </a:solidFill>
-                <a:latin typeface="Calibri"/>
-              </a:rPr>
-              <a:t>–   Hoy cerramos esa puerta con dos piezas: el </a:t>
-            </a:r>
-            <a:r>
-              <a:rPr sz="1600" b="1" i="0">
-                <a:solidFill>
-                  <a:srgbClr val="2B2B2B"/>
-                </a:solidFill>
-                <a:latin typeface="Calibri"/>
-              </a:rPr>
-              <a:t>marco conceptual</a:t>
-            </a:r>
-            <a:r>
-              <a:rPr sz="1600" b="0" i="0">
-                <a:solidFill>
-                  <a:srgbClr val="2B2B2B"/>
-                </a:solidFill>
-                <a:latin typeface="Calibri"/>
-              </a:rPr>
-              <a:t> (qué significan sus términos) y el </a:t>
-            </a:r>
-            <a:r>
-              <a:rPr sz="1600" b="1" i="0">
-                <a:solidFill>
-                  <a:srgbClr val="2B2B2B"/>
-                </a:solidFill>
-                <a:latin typeface="Calibri"/>
-              </a:rPr>
-              <a:t>marco contextual</a:t>
-            </a:r>
-            <a:r>
-              <a:rPr sz="1600" b="0" i="0">
-                <a:solidFill>
-                  <a:srgbClr val="2B2B2B"/>
-                </a:solidFill>
-                <a:latin typeface="Calibri"/>
-              </a:rPr>
-              <a:t> (dónde ocurre todo).</a:t>
-            </a:r>
-          </a:p>
-          <a:p>
-            <a:pPr>
-              <a:spcAft>
-                <a:spcPts val="1000"/>
-              </a:spcAft>
-            </a:pPr>
-            <a:r>
-              <a:rPr sz="1600" b="0" i="0">
-                <a:solidFill>
-                  <a:srgbClr val="2B2B2B"/>
-                </a:solidFill>
-                <a:latin typeface="Calibri"/>
-              </a:rPr>
-              <a:t>–   Con esto queda prácticamente completo el marco referencial del anteproyecto.</a:t>
-            </a:r>
-          </a:p>
-        </p:txBody>
-      </p:sp>
-      <p:sp>
-        <p:nvSpPr>
-          <p:cNvPr id="5" name="TextBox 4"/>
-          <p:cNvSpPr txBox="1"/>
-          <p:nvPr/>
-        </p:nvSpPr>
-        <p:spPr>
-          <a:xfrm>
-            <a:off x="11094415" y="6446520"/>
-            <a:ext cx="548640" cy="274320"/>
-          </a:xfrm>
-          <a:prstGeom prst="rect">
-            <a:avLst/>
-          </a:prstGeom>
-          <a:noFill/>
-        </p:spPr>
-        <p:txBody>
-          <a:bodyPr wrap="square" anchor="t" lIns="0" rIns="0" tIns="0" bIns="0">
-            <a:spAutoFit/>
-          </a:bodyPr>
-          <a:lstStyle/>
-          <a:p>
-            <a:pPr algn="r"/>
-            <a:r>
-              <a:rPr sz="1000" b="1" i="0">
-                <a:solidFill>
-                  <a:srgbClr val="8F989D"/>
-                </a:solidFill>
-                <a:latin typeface="Calibri"/>
-              </a:rPr>
-              <a:t>2</a:t>
-            </a:r>
-          </a:p>
-        </p:txBody>
-      </p:sp>
-      <p:sp>
-        <p:nvSpPr>
-          <p:cNvPr id="6" name="TextBox 5"/>
-          <p:cNvSpPr txBox="1"/>
-          <p:nvPr/>
-        </p:nvSpPr>
-        <p:spPr>
-          <a:xfrm>
-            <a:off x="640080" y="5943600"/>
-            <a:ext cx="9997135" cy="457200"/>
-          </a:xfrm>
-          <a:prstGeom prst="rect">
-            <a:avLst/>
-          </a:prstGeom>
-          <a:noFill/>
-        </p:spPr>
-        <p:txBody>
-          <a:bodyPr wrap="square" anchor="t" lIns="0" rIns="0" tIns="0" bIns="0">
-            <a:spAutoFit/>
-          </a:bodyPr>
-          <a:lstStyle/>
-          <a:p>
-            <a:r>
-              <a:rPr sz="1200" b="0" i="1">
-                <a:solidFill>
-                  <a:srgbClr val="2B2B2B"/>
-                </a:solidFill>
-                <a:latin typeface="Calibri"/>
-              </a:rPr>
-              <a:t>Regla del día: si dos lectores pueden entender cosas distintas por la misma palabra, esa palabra necesita definición operativa.</a:t>
             </a:r>
           </a:p>
         </p:txBody>
